--- a/shared/pdf/docs/render_to_texture.pptx
+++ b/shared/pdf/docs/render_to_texture.pptx
@@ -6,10 +6,11 @@
   </p:sldMasterIdLst>
   <p:sldIdLst>
     <p:sldId id="256" r:id="rId2"/>
-    <p:sldId id="257" r:id="rId3"/>
-    <p:sldId id="258" r:id="rId4"/>
-    <p:sldId id="259" r:id="rId5"/>
-    <p:sldId id="260" r:id="rId6"/>
+    <p:sldId id="261" r:id="rId3"/>
+    <p:sldId id="257" r:id="rId4"/>
+    <p:sldId id="258" r:id="rId5"/>
+    <p:sldId id="259" r:id="rId6"/>
+    <p:sldId id="260" r:id="rId7"/>
   </p:sldIdLst>
   <p:sldSz cx="12192000" cy="6858000"/>
   <p:notesSz cx="6858000" cy="9144000"/>
@@ -108,6 +109,11 @@
       </a:defRPr>
     </a:lvl9pPr>
   </p:defaultTextStyle>
+  <p:extLst>
+    <p:ext uri="{EFAFB233-063F-42B5-8137-9DF3F51BA10A}">
+      <p15:sldGuideLst xmlns:p15="http://schemas.microsoft.com/office/powerpoint/2012/main"/>
+    </p:ext>
+  </p:extLst>
 </p:presentation>
 </file>
 
@@ -3819,8 +3825,8 @@
         </p:nvSpPr>
         <p:spPr bwMode="auto">
           <a:xfrm>
-            <a:off x="314632" y="5159723"/>
-            <a:ext cx="3864075" cy="239151"/>
+            <a:off x="165682" y="3141570"/>
+            <a:ext cx="4163960" cy="1144014"/>
           </a:xfrm>
           <a:prstGeom prst="rect">
             <a:avLst/>
@@ -3986,74 +3992,176 @@
               <a:tabLst/>
             </a:pPr>
             <a:r>
-              <a:rPr kumimoji="0" lang="zh-CN" altLang="zh-CN" sz="1200" b="0" i="0" u="none" strike="noStrike" cap="none" normalizeH="0" baseline="0" dirty="0">
+              <a:rPr kumimoji="0" lang="en-AU" altLang="zh-CN" sz="1200" b="0" i="0" u="none" strike="noStrike" cap="none" normalizeH="0" baseline="0" dirty="0" err="1">
                 <a:ln>
                   <a:noFill/>
                 </a:ln>
                 <a:effectLst/>
                 <a:latin typeface="Consolas" panose="020B0609020204030204" pitchFamily="49" charset="0"/>
               </a:rPr>
-              <a:t>SDL_SetRenderTarget</a:t>
-            </a:r>
-            <a:r>
-              <a:rPr kumimoji="0" lang="zh-CN" altLang="zh-CN" sz="1100" b="0" i="0" u="none" strike="noStrike" cap="none" normalizeH="0" baseline="0" dirty="0">
+              <a:t>SDL_Texture</a:t>
+            </a:r>
+            <a:r>
+              <a:rPr kumimoji="0" lang="en-AU" altLang="zh-CN" sz="1200" b="0" i="0" u="none" strike="noStrike" cap="none" normalizeH="0" baseline="0" dirty="0">
                 <a:ln>
                   <a:noFill/>
                 </a:ln>
                 <a:effectLst/>
                 <a:latin typeface="Consolas" panose="020B0609020204030204" pitchFamily="49" charset="0"/>
               </a:rPr>
-              <a:t>( </a:t>
-            </a:r>
-            <a:r>
-              <a:rPr kumimoji="0" lang="zh-CN" altLang="zh-CN" sz="1200" b="0" i="0" u="none" strike="noStrike" cap="none" normalizeH="0" baseline="0" dirty="0">
+              <a:t>* </a:t>
+            </a:r>
+            <a:r>
+              <a:rPr kumimoji="0" lang="en-AU" altLang="zh-CN" sz="1200" b="0" i="0" u="none" strike="noStrike" cap="none" normalizeH="0" baseline="0" dirty="0" err="1">
                 <a:ln>
                   <a:noFill/>
                 </a:ln>
                 <a:effectLst/>
                 <a:latin typeface="Consolas" panose="020B0609020204030204" pitchFamily="49" charset="0"/>
               </a:rPr>
-              <a:t>gRenderer</a:t>
-            </a:r>
-            <a:r>
-              <a:rPr kumimoji="0" lang="zh-CN" altLang="zh-CN" sz="1100" b="0" i="0" u="none" strike="noStrike" cap="none" normalizeH="0" baseline="0" dirty="0">
+              <a:t>mTexture</a:t>
+            </a:r>
+            <a:r>
+              <a:rPr kumimoji="0" lang="en-AU" altLang="zh-CN" sz="1200" b="0" i="0" u="none" strike="noStrike" cap="none" normalizeH="0" baseline="0" dirty="0">
                 <a:ln>
                   <a:noFill/>
                 </a:ln>
                 <a:effectLst/>
                 <a:latin typeface="Consolas" panose="020B0609020204030204" pitchFamily="49" charset="0"/>
               </a:rPr>
-              <a:t>, </a:t>
-            </a:r>
-            <a:r>
-              <a:rPr kumimoji="0" lang="zh-CN" altLang="zh-CN" sz="1200" b="0" i="0" u="none" strike="noStrike" cap="none" normalizeH="0" baseline="0" dirty="0">
+              <a:t> = </a:t>
+            </a:r>
+            <a:r>
+              <a:rPr kumimoji="0" lang="en-AU" altLang="zh-CN" sz="1200" b="0" i="0" u="none" strike="noStrike" cap="none" normalizeH="0" baseline="0" dirty="0" err="1">
                 <a:ln>
                   <a:noFill/>
                 </a:ln>
                 <a:effectLst/>
                 <a:latin typeface="Consolas" panose="020B0609020204030204" pitchFamily="49" charset="0"/>
               </a:rPr>
-              <a:t>mTexture</a:t>
-            </a:r>
-            <a:r>
-              <a:rPr kumimoji="0" lang="zh-CN" altLang="zh-CN" sz="1100" b="0" i="0" u="none" strike="noStrike" cap="none" normalizeH="0" baseline="0" dirty="0">
+              <a:t>SDL_CreateTexture</a:t>
+            </a:r>
+            <a:r>
+              <a:rPr kumimoji="0" lang="en-AU" altLang="zh-CN" sz="1200" b="0" i="0" u="none" strike="noStrike" cap="none" normalizeH="0" baseline="0" dirty="0">
                 <a:ln>
                   <a:noFill/>
                 </a:ln>
                 <a:effectLst/>
                 <a:latin typeface="Consolas" panose="020B0609020204030204" pitchFamily="49" charset="0"/>
               </a:rPr>
-              <a:t> );</a:t>
-            </a:r>
-            <a:r>
-              <a:rPr kumimoji="0" lang="zh-CN" altLang="zh-CN" sz="500" b="0" i="0" u="none" strike="noStrike" cap="none" normalizeH="0" baseline="0" dirty="0">
+              <a:t>( </a:t>
+            </a:r>
+          </a:p>
+          <a:p>
+            <a:pPr marL="0" marR="0" lvl="0" indent="0" algn="l" defTabSz="914400" rtl="0" eaLnBrk="0" fontAlgn="base" latinLnBrk="0" hangingPunct="0">
+              <a:lnSpc>
+                <a:spcPct val="100000"/>
+              </a:lnSpc>
+              <a:spcBef>
+                <a:spcPct val="30000"/>
+              </a:spcBef>
+              <a:spcAft>
+                <a:spcPct val="0"/>
+              </a:spcAft>
+              <a:buClrTx/>
+              <a:buSzTx/>
+              <a:buFontTx/>
+              <a:buNone/>
+              <a:tabLst/>
+            </a:pPr>
+            <a:r>
+              <a:rPr lang="en-AU" altLang="zh-CN" dirty="0">
+                <a:latin typeface="Consolas" panose="020B0609020204030204" pitchFamily="49" charset="0"/>
+              </a:rPr>
+              <a:t>	</a:t>
+            </a:r>
+            <a:r>
+              <a:rPr kumimoji="0" lang="en-AU" altLang="zh-CN" sz="1200" b="0" i="0" u="none" strike="noStrike" cap="none" normalizeH="0" baseline="0" dirty="0" err="1">
                 <a:ln>
                   <a:noFill/>
                 </a:ln>
                 <a:effectLst/>
                 <a:latin typeface="Consolas" panose="020B0609020204030204" pitchFamily="49" charset="0"/>
               </a:rPr>
-              <a:t> </a:t>
+              <a:t>gRenderer</a:t>
+            </a:r>
+            <a:r>
+              <a:rPr kumimoji="0" lang="en-AU" altLang="zh-CN" sz="1200" b="0" i="0" u="none" strike="noStrike" cap="none" normalizeH="0" baseline="0" dirty="0">
+                <a:ln>
+                  <a:noFill/>
+                </a:ln>
+                <a:effectLst/>
+                <a:latin typeface="Consolas" panose="020B0609020204030204" pitchFamily="49" charset="0"/>
+              </a:rPr>
+              <a:t>, </a:t>
+            </a:r>
+          </a:p>
+          <a:p>
+            <a:pPr marL="0" marR="0" lvl="0" indent="0" algn="l" defTabSz="914400" rtl="0" eaLnBrk="0" fontAlgn="base" latinLnBrk="0" hangingPunct="0">
+              <a:lnSpc>
+                <a:spcPct val="100000"/>
+              </a:lnSpc>
+              <a:spcBef>
+                <a:spcPct val="30000"/>
+              </a:spcBef>
+              <a:spcAft>
+                <a:spcPct val="0"/>
+              </a:spcAft>
+              <a:buClrTx/>
+              <a:buSzTx/>
+              <a:buFontTx/>
+              <a:buNone/>
+              <a:tabLst/>
+            </a:pPr>
+            <a:r>
+              <a:rPr lang="en-AU" altLang="zh-CN" dirty="0">
+                <a:latin typeface="Consolas" panose="020B0609020204030204" pitchFamily="49" charset="0"/>
+              </a:rPr>
+              <a:t>	</a:t>
+            </a:r>
+            <a:r>
+              <a:rPr kumimoji="0" lang="en-AU" altLang="zh-CN" sz="1200" b="0" i="0" u="none" strike="noStrike" cap="none" normalizeH="0" baseline="0" dirty="0">
+                <a:ln>
+                  <a:noFill/>
+                </a:ln>
+                <a:effectLst/>
+                <a:latin typeface="Consolas" panose="020B0609020204030204" pitchFamily="49" charset="0"/>
+              </a:rPr>
+              <a:t>SDL_PIXELFORMAT_RGBA8888, 	SDL_TEXTUREACCESS_TARGET, </a:t>
+            </a:r>
+          </a:p>
+          <a:p>
+            <a:pPr marL="0" marR="0" lvl="0" indent="0" algn="l" defTabSz="914400" rtl="0" eaLnBrk="0" fontAlgn="base" latinLnBrk="0" hangingPunct="0">
+              <a:lnSpc>
+                <a:spcPct val="100000"/>
+              </a:lnSpc>
+              <a:spcBef>
+                <a:spcPct val="30000"/>
+              </a:spcBef>
+              <a:spcAft>
+                <a:spcPct val="0"/>
+              </a:spcAft>
+              <a:buClrTx/>
+              <a:buSzTx/>
+              <a:buFontTx/>
+              <a:buNone/>
+              <a:tabLst/>
+            </a:pPr>
+            <a:r>
+              <a:rPr lang="en-AU" altLang="zh-CN" dirty="0">
+                <a:latin typeface="Consolas" panose="020B0609020204030204" pitchFamily="49" charset="0"/>
+              </a:rPr>
+              <a:t>	</a:t>
+            </a:r>
+            <a:r>
+              <a:rPr kumimoji="0" lang="en-AU" altLang="zh-CN" sz="1200" b="0" i="0" u="none" strike="noStrike" cap="none" normalizeH="0" baseline="0" dirty="0">
+                <a:ln>
+                  <a:noFill/>
+                </a:ln>
+                <a:effectLst/>
+                <a:latin typeface="Consolas" panose="020B0609020204030204" pitchFamily="49" charset="0"/>
+              </a:rPr>
+              <a:t>width, height );</a:t>
             </a:r>
             <a:endParaRPr kumimoji="0" lang="zh-CN" altLang="zh-CN" sz="1200" b="0" i="0" u="none" strike="noStrike" cap="none" normalizeH="0" baseline="0" dirty="0">
               <a:ln>
@@ -4065,96 +4173,10 @@
           </a:p>
         </p:txBody>
       </p:sp>
-      <p:cxnSp>
-        <p:nvCxnSpPr>
-          <p:cNvPr id="23" name="Connector: Curved 22">
-            <a:extLst>
-              <a:ext uri="{FF2B5EF4-FFF2-40B4-BE49-F238E27FC236}">
-                <a16:creationId xmlns:a16="http://schemas.microsoft.com/office/drawing/2014/main" id="{ED09F126-4C2C-477E-BB71-71A98F6C63DD}"/>
-              </a:ext>
-            </a:extLst>
-          </p:cNvPr>
-          <p:cNvCxnSpPr>
-            <a:cxnSpLocks/>
-          </p:cNvCxnSpPr>
-          <p:nvPr/>
-        </p:nvCxnSpPr>
-        <p:spPr>
-          <a:xfrm rot="10800000">
-            <a:off x="2425501" y="1873045"/>
-            <a:ext cx="1841698" cy="1492234"/>
-          </a:xfrm>
-          <a:prstGeom prst="curvedConnector3">
-            <a:avLst/>
-          </a:prstGeom>
-          <a:ln w="38100">
-            <a:prstDash val="sysDash"/>
-            <a:tailEnd type="triangle"/>
-          </a:ln>
-        </p:spPr>
-        <p:style>
-          <a:lnRef idx="1">
-            <a:schemeClr val="accent1"/>
-          </a:lnRef>
-          <a:fillRef idx="0">
-            <a:schemeClr val="accent1"/>
-          </a:fillRef>
-          <a:effectRef idx="0">
-            <a:schemeClr val="accent1"/>
-          </a:effectRef>
-          <a:fontRef idx="minor">
-            <a:schemeClr val="tx1"/>
-          </a:fontRef>
-        </p:style>
-      </p:cxnSp>
-      <p:sp>
-        <p:nvSpPr>
-          <p:cNvPr id="25" name="TextBox 24">
-            <a:extLst>
-              <a:ext uri="{FF2B5EF4-FFF2-40B4-BE49-F238E27FC236}">
-                <a16:creationId xmlns:a16="http://schemas.microsoft.com/office/drawing/2014/main" id="{0D7F8E5C-F32D-4280-8AD2-6B4735478EB4}"/>
-              </a:ext>
-            </a:extLst>
-          </p:cNvPr>
-          <p:cNvSpPr txBox="1"/>
-          <p:nvPr/>
-        </p:nvSpPr>
-        <p:spPr>
-          <a:xfrm>
-            <a:off x="2425501" y="2434496"/>
-            <a:ext cx="1595309" cy="369332"/>
-          </a:xfrm>
-          <a:prstGeom prst="rect">
-            <a:avLst/>
-          </a:prstGeom>
-          <a:noFill/>
-        </p:spPr>
-        <p:txBody>
-          <a:bodyPr wrap="none" rtlCol="0">
-            <a:spAutoFit/>
-          </a:bodyPr>
-          <a:lstStyle/>
-          <a:p>
-            <a:r>
-              <a:rPr lang="en-US" altLang="zh-CN" dirty="0">
-                <a:highlight>
-                  <a:srgbClr val="FFFF00"/>
-                </a:highlight>
-              </a:rPr>
-              <a:t>Render Target</a:t>
-            </a:r>
-            <a:endParaRPr lang="zh-CN" altLang="en-US" dirty="0">
-              <a:highlight>
-                <a:srgbClr val="FFFF00"/>
-              </a:highlight>
-            </a:endParaRPr>
-          </a:p>
-        </p:txBody>
-      </p:sp>
     </p:spTree>
     <p:extLst>
       <p:ext uri="{BB962C8B-B14F-4D97-AF65-F5344CB8AC3E}">
-        <p14:creationId xmlns:p14="http://schemas.microsoft.com/office/powerpoint/2010/main" val="427458835"/>
+        <p14:creationId xmlns:p14="http://schemas.microsoft.com/office/powerpoint/2010/main" val="3443356980"/>
       </p:ext>
     </p:extLst>
   </p:cSld>
@@ -4195,8 +4217,8 @@
         </p:nvSpPr>
         <p:spPr>
           <a:xfrm>
-            <a:off x="752168" y="796412"/>
-            <a:ext cx="1396180" cy="1475509"/>
+            <a:off x="752168" y="796413"/>
+            <a:ext cx="1396180" cy="1371600"/>
           </a:xfrm>
           <a:prstGeom prst="rect">
             <a:avLst/>
@@ -4566,8 +4588,8 @@
         </p:nvSpPr>
         <p:spPr bwMode="auto">
           <a:xfrm>
-            <a:off x="194804" y="5053225"/>
-            <a:ext cx="6378058" cy="1159403"/>
+            <a:off x="324465" y="3829406"/>
+            <a:ext cx="5004617" cy="1624145"/>
           </a:xfrm>
           <a:prstGeom prst="rect">
             <a:avLst/>
@@ -4731,72 +4753,65 @@
               <a:tabLst/>
             </a:pPr>
             <a:r>
-              <a:rPr kumimoji="0" lang="zh-CN" altLang="zh-CN" sz="1200" b="0" i="0" u="none" strike="noStrike" cap="none" normalizeH="0" baseline="0" dirty="0">
+              <a:rPr kumimoji="0" lang="en-AU" altLang="zh-CN" sz="1200" b="0" i="0" u="none" strike="noStrike" cap="none" normalizeH="0" baseline="0" dirty="0" err="1">
                 <a:ln>
                   <a:noFill/>
                 </a:ln>
                 <a:effectLst/>
                 <a:latin typeface="Consolas" panose="020B0609020204030204" pitchFamily="49" charset="0"/>
               </a:rPr>
-              <a:t>SDL_SetRenderTarget</a:t>
-            </a:r>
-            <a:r>
-              <a:rPr kumimoji="0" lang="zh-CN" altLang="zh-CN" sz="1100" b="0" i="0" u="none" strike="noStrike" cap="none" normalizeH="0" baseline="0" dirty="0">
+              <a:t>SDL_Texture</a:t>
+            </a:r>
+            <a:r>
+              <a:rPr kumimoji="0" lang="en-AU" altLang="zh-CN" sz="1200" b="0" i="0" u="none" strike="noStrike" cap="none" normalizeH="0" baseline="0" dirty="0">
                 <a:ln>
                   <a:noFill/>
                 </a:ln>
                 <a:effectLst/>
                 <a:latin typeface="Consolas" panose="020B0609020204030204" pitchFamily="49" charset="0"/>
               </a:rPr>
-              <a:t>( </a:t>
-            </a:r>
-            <a:r>
-              <a:rPr kumimoji="0" lang="zh-CN" altLang="zh-CN" sz="1200" b="0" i="0" u="none" strike="noStrike" cap="none" normalizeH="0" baseline="0" dirty="0">
+              <a:t>* </a:t>
+            </a:r>
+            <a:r>
+              <a:rPr kumimoji="0" lang="en-AU" altLang="zh-CN" sz="1200" b="0" i="0" u="none" strike="noStrike" cap="none" normalizeH="0" baseline="0" dirty="0" err="1">
                 <a:ln>
                   <a:noFill/>
                 </a:ln>
                 <a:effectLst/>
                 <a:latin typeface="Consolas" panose="020B0609020204030204" pitchFamily="49" charset="0"/>
               </a:rPr>
-              <a:t>gRenderer</a:t>
-            </a:r>
-            <a:r>
-              <a:rPr kumimoji="0" lang="zh-CN" altLang="zh-CN" sz="1100" b="0" i="0" u="none" strike="noStrike" cap="none" normalizeH="0" baseline="0" dirty="0">
+              <a:t>mTexture</a:t>
+            </a:r>
+            <a:r>
+              <a:rPr kumimoji="0" lang="en-AU" altLang="zh-CN" sz="1200" b="0" i="0" u="none" strike="noStrike" cap="none" normalizeH="0" baseline="0" dirty="0">
                 <a:ln>
                   <a:noFill/>
                 </a:ln>
                 <a:effectLst/>
                 <a:latin typeface="Consolas" panose="020B0609020204030204" pitchFamily="49" charset="0"/>
               </a:rPr>
-              <a:t>, </a:t>
-            </a:r>
-            <a:r>
-              <a:rPr kumimoji="0" lang="zh-CN" altLang="zh-CN" sz="1200" b="0" i="0" u="none" strike="noStrike" cap="none" normalizeH="0" baseline="0" dirty="0">
+              <a:t> = </a:t>
+            </a:r>
+            <a:r>
+              <a:rPr kumimoji="0" lang="en-AU" altLang="zh-CN" sz="1200" b="0" i="0" u="none" strike="noStrike" cap="none" normalizeH="0" baseline="0" dirty="0" err="1">
                 <a:ln>
                   <a:noFill/>
                 </a:ln>
                 <a:effectLst/>
                 <a:latin typeface="Consolas" panose="020B0609020204030204" pitchFamily="49" charset="0"/>
               </a:rPr>
-              <a:t>mTexture</a:t>
-            </a:r>
-            <a:r>
-              <a:rPr kumimoji="0" lang="zh-CN" altLang="zh-CN" sz="1100" b="0" i="0" u="none" strike="noStrike" cap="none" normalizeH="0" baseline="0" dirty="0">
+              <a:t>SDL_CreateTexture</a:t>
+            </a:r>
+            <a:r>
+              <a:rPr kumimoji="0" lang="en-AU" altLang="zh-CN" sz="1200" b="0" i="0" u="none" strike="noStrike" cap="none" normalizeH="0" baseline="0" dirty="0">
                 <a:ln>
                   <a:noFill/>
                 </a:ln>
                 <a:effectLst/>
                 <a:latin typeface="Consolas" panose="020B0609020204030204" pitchFamily="49" charset="0"/>
               </a:rPr>
-              <a:t> );</a:t>
-            </a:r>
-            <a:endParaRPr kumimoji="0" lang="en-US" altLang="zh-CN" sz="1100" b="0" i="0" u="none" strike="noStrike" cap="none" normalizeH="0" baseline="0" dirty="0">
-              <a:ln>
-                <a:noFill/>
-              </a:ln>
-              <a:effectLst/>
-              <a:latin typeface="Consolas" panose="020B0609020204030204" pitchFamily="49" charset="0"/>
-            </a:endParaRPr>
+              <a:t>( </a:t>
+            </a:r>
           </a:p>
           <a:p>
             <a:pPr marL="0" marR="0" lvl="0" indent="0" algn="l" defTabSz="914400" rtl="0" eaLnBrk="0" fontAlgn="base" latinLnBrk="0" hangingPunct="0">
@@ -4815,9 +4830,32 @@
               <a:buNone/>
               <a:tabLst/>
             </a:pPr>
-            <a:endParaRPr lang="en-US" altLang="zh-CN" sz="1100" dirty="0">
-              <a:latin typeface="Consolas" panose="020B0609020204030204" pitchFamily="49" charset="0"/>
-            </a:endParaRPr>
+            <a:r>
+              <a:rPr lang="en-AU" altLang="zh-CN" dirty="0">
+                <a:latin typeface="Consolas" panose="020B0609020204030204" pitchFamily="49" charset="0"/>
+              </a:rPr>
+              <a:t>	</a:t>
+            </a:r>
+            <a:r>
+              <a:rPr kumimoji="0" lang="en-AU" altLang="zh-CN" sz="1200" b="0" i="0" u="none" strike="noStrike" cap="none" normalizeH="0" baseline="0" dirty="0" err="1">
+                <a:ln>
+                  <a:noFill/>
+                </a:ln>
+                <a:effectLst/>
+                <a:latin typeface="Consolas" panose="020B0609020204030204" pitchFamily="49" charset="0"/>
+              </a:rPr>
+              <a:t>gRenderer</a:t>
+            </a:r>
+            <a:r>
+              <a:rPr kumimoji="0" lang="en-AU" altLang="zh-CN" sz="1200" b="0" i="0" u="none" strike="noStrike" cap="none" normalizeH="0" baseline="0" dirty="0">
+                <a:ln>
+                  <a:noFill/>
+                </a:ln>
+                <a:effectLst/>
+                <a:latin typeface="Consolas" panose="020B0609020204030204" pitchFamily="49" charset="0"/>
+              </a:rPr>
+              <a:t>, </a:t>
+            </a:r>
           </a:p>
           <a:p>
             <a:pPr marL="0" marR="0" lvl="0" indent="0" algn="l" defTabSz="914400" rtl="0" eaLnBrk="0" fontAlgn="base" latinLnBrk="0" hangingPunct="0">
@@ -4837,46 +4875,21 @@
               <a:tabLst/>
             </a:pPr>
             <a:r>
-              <a:rPr kumimoji="0" lang="en-US" altLang="zh-CN" sz="1100" b="0" i="0" u="none" strike="noStrike" cap="none" normalizeH="0" baseline="0" dirty="0">
+              <a:rPr lang="en-AU" altLang="zh-CN" dirty="0">
+                <a:latin typeface="Consolas" panose="020B0609020204030204" pitchFamily="49" charset="0"/>
+              </a:rPr>
+              <a:t>	</a:t>
+            </a:r>
+            <a:r>
+              <a:rPr kumimoji="0" lang="en-AU" altLang="zh-CN" sz="1200" b="0" i="0" u="none" strike="noStrike" cap="none" normalizeH="0" baseline="0" dirty="0">
                 <a:ln>
                   <a:noFill/>
                 </a:ln>
-                <a:solidFill>
-                  <a:schemeClr val="accent6">
-                    <a:lumMod val="60000"/>
-                    <a:lumOff val="40000"/>
-                  </a:schemeClr>
-                </a:solidFill>
                 <a:effectLst/>
                 <a:latin typeface="Consolas" panose="020B0609020204030204" pitchFamily="49" charset="0"/>
               </a:rPr>
-              <a:t>// Drawin</a:t>
-            </a:r>
-            <a:r>
-              <a:rPr lang="en-US" altLang="zh-CN" sz="1100" dirty="0">
-                <a:solidFill>
-                  <a:schemeClr val="accent6">
-                    <a:lumMod val="60000"/>
-                    <a:lumOff val="40000"/>
-                  </a:schemeClr>
-                </a:solidFill>
-                <a:latin typeface="Consolas" panose="020B0609020204030204" pitchFamily="49" charset="0"/>
-              </a:rPr>
-              <a:t>g to image to render target…</a:t>
-            </a:r>
-            <a:endParaRPr kumimoji="0" lang="en-US" altLang="zh-CN" sz="500" b="0" i="0" u="none" strike="noStrike" cap="none" normalizeH="0" baseline="0" dirty="0">
-              <a:ln>
-                <a:noFill/>
-              </a:ln>
-              <a:solidFill>
-                <a:schemeClr val="accent6">
-                  <a:lumMod val="60000"/>
-                  <a:lumOff val="40000"/>
-                </a:schemeClr>
-              </a:solidFill>
-              <a:effectLst/>
-              <a:latin typeface="Consolas" panose="020B0609020204030204" pitchFamily="49" charset="0"/>
-            </a:endParaRPr>
+              <a:t>SDL_PIXELFORMAT_RGBA8888, 	SDL_TEXTUREACCESS_TARGET, </a:t>
+            </a:r>
           </a:p>
           <a:p>
             <a:pPr marL="0" marR="0" lvl="0" indent="0" algn="l" defTabSz="914400" rtl="0" eaLnBrk="0" fontAlgn="base" latinLnBrk="0" hangingPunct="0">
@@ -4896,61 +4909,28 @@
               <a:tabLst/>
             </a:pPr>
             <a:r>
-              <a:rPr kumimoji="0" lang="en-AU" altLang="zh-CN" sz="1200" b="0" i="0" u="none" strike="noStrike" cap="none" normalizeH="0" baseline="0" dirty="0" err="1">
+              <a:rPr lang="en-AU" altLang="zh-CN" dirty="0">
+                <a:latin typeface="Consolas" panose="020B0609020204030204" pitchFamily="49" charset="0"/>
+              </a:rPr>
+              <a:t>	</a:t>
+            </a:r>
+            <a:r>
+              <a:rPr kumimoji="0" lang="en-AU" altLang="zh-CN" sz="1200" b="0" i="0" u="none" strike="noStrike" cap="none" normalizeH="0" baseline="0" dirty="0">
                 <a:ln>
                   <a:noFill/>
                 </a:ln>
                 <a:effectLst/>
                 <a:latin typeface="Consolas" panose="020B0609020204030204" pitchFamily="49" charset="0"/>
               </a:rPr>
-              <a:t>SDL_Surface</a:t>
-            </a:r>
-            <a:r>
-              <a:rPr lang="en-AU" altLang="zh-CN" dirty="0">
-                <a:latin typeface="Consolas" panose="020B0609020204030204" pitchFamily="49" charset="0"/>
-              </a:rPr>
-              <a:t>* </a:t>
-            </a:r>
-            <a:r>
-              <a:rPr lang="en-AU" altLang="zh-CN" dirty="0" err="1">
-                <a:latin typeface="Consolas" panose="020B0609020204030204" pitchFamily="49" charset="0"/>
-              </a:rPr>
-              <a:t>y</a:t>
-            </a:r>
-            <a:r>
-              <a:rPr kumimoji="0" lang="en-AU" altLang="zh-CN" sz="1200" b="0" i="0" u="none" strike="noStrike" cap="none" normalizeH="0" baseline="0" dirty="0" err="1">
-                <a:ln>
-                  <a:noFill/>
-                </a:ln>
-                <a:effectLst/>
-                <a:latin typeface="Consolas" panose="020B0609020204030204" pitchFamily="49" charset="0"/>
-              </a:rPr>
-              <a:t>uzuri</a:t>
-            </a:r>
-            <a:r>
-              <a:rPr lang="en-AU" altLang="zh-CN" dirty="0" err="1">
-                <a:latin typeface="Consolas" panose="020B0609020204030204" pitchFamily="49" charset="0"/>
-              </a:rPr>
-              <a:t>haSurface</a:t>
-            </a:r>
-            <a:r>
-              <a:rPr lang="en-AU" altLang="zh-CN" dirty="0">
-                <a:latin typeface="Consolas" panose="020B0609020204030204" pitchFamily="49" charset="0"/>
-              </a:rPr>
-              <a:t> = </a:t>
-            </a:r>
-            <a:r>
-              <a:rPr lang="en-AU" altLang="zh-CN" dirty="0" err="1">
-                <a:latin typeface="Consolas" panose="020B0609020204030204" pitchFamily="49" charset="0"/>
-              </a:rPr>
-              <a:t>IMG_Load</a:t>
-            </a:r>
-            <a:r>
-              <a:rPr lang="en-AU" altLang="zh-CN" dirty="0">
-                <a:latin typeface="Consolas" panose="020B0609020204030204" pitchFamily="49" charset="0"/>
-              </a:rPr>
-              <a:t>(“yuzuruha.png”);</a:t>
-            </a:r>
+              <a:t>width, height );</a:t>
+            </a:r>
+            <a:endParaRPr kumimoji="0" lang="zh-CN" altLang="zh-CN" sz="1200" b="0" i="0" u="none" strike="noStrike" cap="none" normalizeH="0" baseline="0" dirty="0">
+              <a:ln>
+                <a:noFill/>
+              </a:ln>
+              <a:effectLst/>
+              <a:latin typeface="Consolas" panose="020B0609020204030204" pitchFamily="49" charset="0"/>
+            </a:endParaRPr>
           </a:p>
           <a:p>
             <a:pPr marL="0" marR="0" lvl="0" indent="0" algn="l" defTabSz="914400" rtl="0" eaLnBrk="0" fontAlgn="base" latinLnBrk="0" hangingPunct="0">
@@ -4969,129 +4949,102 @@
               <a:buNone/>
               <a:tabLst/>
             </a:pPr>
-            <a:r>
-              <a:rPr kumimoji="0" lang="en-AU" altLang="zh-CN" sz="1200" b="0" i="0" u="none" strike="noStrike" cap="none" normalizeH="0" baseline="0" dirty="0" err="1">
+            <a:endParaRPr kumimoji="0" lang="en-US" altLang="zh-CN" sz="1200" b="0" i="0" u="none" strike="noStrike" cap="none" normalizeH="0" baseline="0" dirty="0">
+              <a:ln>
+                <a:noFill/>
+              </a:ln>
+              <a:effectLst/>
+              <a:latin typeface="Consolas" panose="020B0609020204030204" pitchFamily="49" charset="0"/>
+            </a:endParaRPr>
+          </a:p>
+          <a:p>
+            <a:pPr marL="0" marR="0" lvl="0" indent="0" algn="l" defTabSz="914400" rtl="0" eaLnBrk="0" fontAlgn="base" latinLnBrk="0" hangingPunct="0">
+              <a:lnSpc>
+                <a:spcPct val="100000"/>
+              </a:lnSpc>
+              <a:spcBef>
+                <a:spcPct val="30000"/>
+              </a:spcBef>
+              <a:spcAft>
+                <a:spcPct val="0"/>
+              </a:spcAft>
+              <a:buClrTx/>
+              <a:buSzTx/>
+              <a:buFontTx/>
+              <a:buNone/>
+              <a:tabLst/>
+            </a:pPr>
+            <a:r>
+              <a:rPr kumimoji="0" lang="zh-CN" altLang="zh-CN" sz="1200" b="0" i="0" u="none" strike="noStrike" cap="none" normalizeH="0" baseline="0" dirty="0">
                 <a:ln>
                   <a:noFill/>
                 </a:ln>
                 <a:effectLst/>
                 <a:latin typeface="Consolas" panose="020B0609020204030204" pitchFamily="49" charset="0"/>
               </a:rPr>
-              <a:t>SDL_Texture</a:t>
-            </a:r>
-            <a:r>
-              <a:rPr kumimoji="0" lang="en-AU" altLang="zh-CN" sz="1200" b="0" i="0" u="none" strike="noStrike" cap="none" normalizeH="0" baseline="0" dirty="0">
+              <a:t>SDL_SetRenderTarget</a:t>
+            </a:r>
+            <a:r>
+              <a:rPr kumimoji="0" lang="zh-CN" altLang="zh-CN" sz="1100" b="0" i="0" u="none" strike="noStrike" cap="none" normalizeH="0" baseline="0" dirty="0">
                 <a:ln>
                   <a:noFill/>
                 </a:ln>
                 <a:effectLst/>
                 <a:latin typeface="Consolas" panose="020B0609020204030204" pitchFamily="49" charset="0"/>
               </a:rPr>
-              <a:t>* </a:t>
-            </a:r>
-            <a:r>
-              <a:rPr kumimoji="0" lang="en-AU" altLang="zh-CN" sz="1200" b="0" i="0" u="none" strike="noStrike" cap="none" normalizeH="0" baseline="0" dirty="0" err="1">
+              <a:t>( </a:t>
+            </a:r>
+            <a:r>
+              <a:rPr kumimoji="0" lang="zh-CN" altLang="zh-CN" sz="1200" b="0" i="0" u="none" strike="noStrike" cap="none" normalizeH="0" baseline="0" dirty="0">
                 <a:ln>
                   <a:noFill/>
                 </a:ln>
                 <a:effectLst/>
                 <a:latin typeface="Consolas" panose="020B0609020204030204" pitchFamily="49" charset="0"/>
               </a:rPr>
-              <a:t>mTexture</a:t>
-            </a:r>
-            <a:r>
-              <a:rPr kumimoji="0" lang="en-AU" altLang="zh-CN" sz="1200" b="0" i="0" u="none" strike="noStrike" cap="none" normalizeH="0" baseline="0" dirty="0">
+              <a:t>gRenderer</a:t>
+            </a:r>
+            <a:r>
+              <a:rPr kumimoji="0" lang="zh-CN" altLang="zh-CN" sz="1100" b="0" i="0" u="none" strike="noStrike" cap="none" normalizeH="0" baseline="0" dirty="0">
                 <a:ln>
                   <a:noFill/>
                 </a:ln>
                 <a:effectLst/>
                 <a:latin typeface="Consolas" panose="020B0609020204030204" pitchFamily="49" charset="0"/>
               </a:rPr>
-              <a:t> = </a:t>
-            </a:r>
-            <a:r>
-              <a:rPr kumimoji="0" lang="en-AU" altLang="zh-CN" sz="1200" b="0" i="0" u="none" strike="noStrike" cap="none" normalizeH="0" baseline="0" dirty="0" err="1">
+              <a:t>, </a:t>
+            </a:r>
+            <a:r>
+              <a:rPr kumimoji="0" lang="zh-CN" altLang="zh-CN" sz="1200" b="0" i="0" u="none" strike="noStrike" cap="none" normalizeH="0" baseline="0" dirty="0">
                 <a:ln>
                   <a:noFill/>
                 </a:ln>
                 <a:effectLst/>
                 <a:latin typeface="Consolas" panose="020B0609020204030204" pitchFamily="49" charset="0"/>
               </a:rPr>
-              <a:t>Crea</a:t>
-            </a:r>
-            <a:r>
-              <a:rPr kumimoji="0" lang="en-US" altLang="zh-CN" sz="1200" b="0" i="0" u="none" strike="noStrike" cap="none" normalizeH="0" baseline="0" dirty="0" err="1">
+              <a:t>mTexture</a:t>
+            </a:r>
+            <a:r>
+              <a:rPr kumimoji="0" lang="zh-CN" altLang="zh-CN" sz="1100" b="0" i="0" u="none" strike="noStrike" cap="none" normalizeH="0" baseline="0" dirty="0">
                 <a:ln>
                   <a:noFill/>
                 </a:ln>
                 <a:effectLst/>
                 <a:latin typeface="Consolas" panose="020B0609020204030204" pitchFamily="49" charset="0"/>
               </a:rPr>
-              <a:t>teTextureFromSurface</a:t>
-            </a:r>
-            <a:r>
-              <a:rPr kumimoji="0" lang="en-US" altLang="zh-CN" sz="1200" b="0" i="0" u="none" strike="noStrike" cap="none" normalizeH="0" baseline="0" dirty="0">
+              <a:t> );</a:t>
+            </a:r>
+            <a:r>
+              <a:rPr kumimoji="0" lang="zh-CN" altLang="zh-CN" sz="500" b="0" i="0" u="none" strike="noStrike" cap="none" normalizeH="0" baseline="0" dirty="0">
                 <a:ln>
                   <a:noFill/>
                 </a:ln>
                 <a:effectLst/>
                 <a:latin typeface="Consolas" panose="020B0609020204030204" pitchFamily="49" charset="0"/>
               </a:rPr>
-              <a:t>(</a:t>
-            </a:r>
-            <a:r>
-              <a:rPr kumimoji="0" lang="en-US" altLang="zh-CN" sz="1200" b="0" i="0" u="none" strike="noStrike" cap="none" normalizeH="0" baseline="0" dirty="0" err="1">
-                <a:ln>
-                  <a:noFill/>
-                </a:ln>
-                <a:effectLst/>
-                <a:latin typeface="Consolas" panose="020B0609020204030204" pitchFamily="49" charset="0"/>
-              </a:rPr>
-              <a:t>gRender</a:t>
-            </a:r>
-            <a:r>
-              <a:rPr kumimoji="0" lang="en-US" altLang="zh-CN" sz="1200" b="0" i="0" u="none" strike="noStrike" cap="none" normalizeH="0" baseline="0" dirty="0">
-                <a:ln>
-                  <a:noFill/>
-                </a:ln>
-                <a:effectLst/>
-                <a:latin typeface="Consolas" panose="020B0609020204030204" pitchFamily="49" charset="0"/>
-              </a:rPr>
-              <a:t>, </a:t>
-            </a:r>
-            <a:r>
-              <a:rPr lang="en-AU" altLang="zh-CN" dirty="0" err="1">
-                <a:latin typeface="Consolas" panose="020B0609020204030204" pitchFamily="49" charset="0"/>
-              </a:rPr>
-              <a:t>y</a:t>
-            </a:r>
-            <a:r>
-              <a:rPr kumimoji="0" lang="en-AU" altLang="zh-CN" sz="1000" b="0" i="0" u="none" strike="noStrike" cap="none" normalizeH="0" baseline="0" dirty="0" err="1">
-                <a:ln>
-                  <a:noFill/>
-                </a:ln>
-                <a:effectLst/>
-                <a:latin typeface="Consolas" panose="020B0609020204030204" pitchFamily="49" charset="0"/>
-              </a:rPr>
-              <a:t>uzuri</a:t>
-            </a:r>
-            <a:r>
-              <a:rPr lang="en-AU" altLang="zh-CN" dirty="0" err="1">
-                <a:latin typeface="Consolas" panose="020B0609020204030204" pitchFamily="49" charset="0"/>
-              </a:rPr>
-              <a:t>haSurface</a:t>
-            </a:r>
-            <a:r>
-              <a:rPr kumimoji="0" lang="en-US" altLang="zh-CN" sz="1200" b="0" i="0" u="none" strike="noStrike" cap="none" normalizeH="0" baseline="0" dirty="0">
-                <a:ln>
-                  <a:noFill/>
-                </a:ln>
-                <a:effectLst/>
-                <a:latin typeface="Consolas" panose="020B0609020204030204" pitchFamily="49" charset="0"/>
-              </a:rPr>
-              <a:t>); </a:t>
-            </a:r>
-            <a:endParaRPr kumimoji="0" lang="en-AU" altLang="zh-CN" sz="1200" b="0" i="0" u="none" strike="noStrike" cap="none" normalizeH="0" baseline="0" dirty="0">
+              <a:t> </a:t>
+            </a:r>
+            <a:endParaRPr kumimoji="0" lang="zh-CN" altLang="zh-CN" sz="1200" b="0" i="0" u="none" strike="noStrike" cap="none" normalizeH="0" baseline="0" dirty="0">
               <a:ln>
                 <a:noFill/>
               </a:ln>
@@ -5157,7 +5110,7 @@
         </p:nvSpPr>
         <p:spPr>
           <a:xfrm>
-            <a:off x="2586178" y="2434496"/>
+            <a:off x="2425501" y="2434496"/>
             <a:ext cx="1595309" cy="369332"/>
           </a:xfrm>
           <a:prstGeom prst="rect">
@@ -5187,40 +5140,10 @@
           </a:p>
         </p:txBody>
       </p:sp>
-      <p:pic>
-        <p:nvPicPr>
-          <p:cNvPr id="3" name="Picture 2">
-            <a:extLst>
-              <a:ext uri="{FF2B5EF4-FFF2-40B4-BE49-F238E27FC236}">
-                <a16:creationId xmlns:a16="http://schemas.microsoft.com/office/drawing/2014/main" id="{46BFE751-BD90-449B-8EB2-704D3B1414FE}"/>
-              </a:ext>
-            </a:extLst>
-          </p:cNvPr>
-          <p:cNvPicPr>
-            <a:picLocks noChangeAspect="1"/>
-          </p:cNvPicPr>
-          <p:nvPr/>
-        </p:nvPicPr>
-        <p:blipFill>
-          <a:blip r:embed="rId3"/>
-          <a:stretch>
-            <a:fillRect/>
-          </a:stretch>
-        </p:blipFill>
-        <p:spPr>
-          <a:xfrm>
-            <a:off x="809001" y="839329"/>
-            <a:ext cx="1259493" cy="1389673"/>
-          </a:xfrm>
-          <a:prstGeom prst="rect">
-            <a:avLst/>
-          </a:prstGeom>
-        </p:spPr>
-      </p:pic>
     </p:spTree>
     <p:extLst>
       <p:ext uri="{BB962C8B-B14F-4D97-AF65-F5344CB8AC3E}">
-        <p14:creationId xmlns:p14="http://schemas.microsoft.com/office/powerpoint/2010/main" val="540776457"/>
+        <p14:creationId xmlns:p14="http://schemas.microsoft.com/office/powerpoint/2010/main" val="427458835"/>
       </p:ext>
     </p:extLst>
   </p:cSld>
@@ -5632,8 +5555,8 @@
         </p:nvSpPr>
         <p:spPr bwMode="auto">
           <a:xfrm>
-            <a:off x="245813" y="4353914"/>
-            <a:ext cx="6378058" cy="1879600"/>
+            <a:off x="215239" y="4483095"/>
+            <a:ext cx="6378058" cy="1379463"/>
           </a:xfrm>
           <a:prstGeom prst="rect">
             <a:avLst/>
@@ -5797,6 +5720,37 @@
               <a:tabLst/>
             </a:pPr>
             <a:r>
+              <a:rPr lang="en-AU" altLang="zh-CN" dirty="0">
+                <a:latin typeface="Consolas" panose="020B0609020204030204" pitchFamily="49" charset="0"/>
+              </a:rPr>
+              <a:t>……</a:t>
+            </a:r>
+            <a:endParaRPr kumimoji="0" lang="zh-CN" altLang="zh-CN" sz="1200" b="0" i="0" u="none" strike="noStrike" cap="none" normalizeH="0" baseline="0" dirty="0">
+              <a:ln>
+                <a:noFill/>
+              </a:ln>
+              <a:effectLst/>
+              <a:latin typeface="Consolas" panose="020B0609020204030204" pitchFamily="49" charset="0"/>
+            </a:endParaRPr>
+          </a:p>
+          <a:p>
+            <a:pPr marL="0" marR="0" lvl="0" indent="0" algn="l" defTabSz="914400" rtl="0" eaLnBrk="0" fontAlgn="base" latinLnBrk="0" hangingPunct="0">
+              <a:lnSpc>
+                <a:spcPct val="100000"/>
+              </a:lnSpc>
+              <a:spcBef>
+                <a:spcPct val="30000"/>
+              </a:spcBef>
+              <a:spcAft>
+                <a:spcPct val="0"/>
+              </a:spcAft>
+              <a:buClrTx/>
+              <a:buSzTx/>
+              <a:buFontTx/>
+              <a:buNone/>
+              <a:tabLst/>
+            </a:pPr>
+            <a:r>
               <a:rPr kumimoji="0" lang="zh-CN" altLang="zh-CN" sz="1200" b="0" i="0" u="none" strike="noStrike" cap="none" normalizeH="0" baseline="0" dirty="0">
                 <a:ln>
                   <a:noFill/>
@@ -5930,19 +5884,68 @@
               </a:rPr>
               <a:t>g to image to render target…</a:t>
             </a:r>
-            <a:endParaRPr kumimoji="0" lang="en-US" altLang="zh-CN" sz="500" b="1" i="0" u="none" strike="noStrike" cap="none" normalizeH="0" baseline="0" dirty="0">
-              <a:ln>
-                <a:noFill/>
-              </a:ln>
-              <a:solidFill>
-                <a:schemeClr val="accent6">
-                  <a:lumMod val="60000"/>
-                  <a:lumOff val="40000"/>
-                </a:schemeClr>
-              </a:solidFill>
-              <a:effectLst/>
-              <a:latin typeface="Consolas" panose="020B0609020204030204" pitchFamily="49" charset="0"/>
-            </a:endParaRPr>
+          </a:p>
+          <a:p>
+            <a:r>
+              <a:rPr kumimoji="0" lang="en-AU" altLang="zh-CN" b="0" i="0" u="none" strike="noStrike" cap="none" normalizeH="0" baseline="0" dirty="0" err="1">
+                <a:ln>
+                  <a:noFill/>
+                </a:ln>
+                <a:effectLst/>
+                <a:latin typeface="Consolas" panose="020B0609020204030204" pitchFamily="49" charset="0"/>
+              </a:rPr>
+              <a:t>SDL_RenderCopy</a:t>
+            </a:r>
+            <a:r>
+              <a:rPr kumimoji="0" lang="en-AU" altLang="zh-CN" b="0" i="0" u="none" strike="noStrike" cap="none" normalizeH="0" baseline="0" dirty="0">
+                <a:ln>
+                  <a:noFill/>
+                </a:ln>
+                <a:effectLst/>
+                <a:latin typeface="Consolas" panose="020B0609020204030204" pitchFamily="49" charset="0"/>
+              </a:rPr>
+              <a:t>(</a:t>
+            </a:r>
+            <a:r>
+              <a:rPr kumimoji="0" lang="en-AU" altLang="zh-CN" b="0" i="0" u="none" strike="noStrike" cap="none" normalizeH="0" baseline="0" dirty="0" err="1">
+                <a:ln>
+                  <a:noFill/>
+                </a:ln>
+                <a:effectLst/>
+                <a:latin typeface="Consolas" panose="020B0609020204030204" pitchFamily="49" charset="0"/>
+              </a:rPr>
+              <a:t>gRenderer</a:t>
+            </a:r>
+            <a:r>
+              <a:rPr kumimoji="0" lang="en-AU" altLang="zh-CN" b="0" i="0" u="none" strike="noStrike" cap="none" normalizeH="0" baseline="0" dirty="0">
+                <a:ln>
+                  <a:noFill/>
+                </a:ln>
+                <a:effectLst/>
+                <a:latin typeface="Consolas" panose="020B0609020204030204" pitchFamily="49" charset="0"/>
+              </a:rPr>
+              <a:t>, </a:t>
+            </a:r>
+            <a:r>
+              <a:rPr kumimoji="0" lang="en-US" altLang="zh-CN" b="0" i="0" u="none" strike="noStrike" cap="none" normalizeH="0" baseline="0" dirty="0" err="1">
+                <a:ln>
+                  <a:noFill/>
+                </a:ln>
+                <a:effectLst/>
+                <a:latin typeface="Consolas" panose="020B0609020204030204" pitchFamily="49" charset="0"/>
+              </a:rPr>
+              <a:t>yuzurihaTexture</a:t>
+            </a:r>
+            <a:r>
+              <a:rPr kumimoji="0" lang="en-AU" altLang="zh-CN" b="0" i="0" u="none" strike="noStrike" cap="none" normalizeH="0" baseline="0" dirty="0">
+                <a:ln>
+                  <a:noFill/>
+                </a:ln>
+                <a:effectLst/>
+                <a:latin typeface="Consolas" panose="020B0609020204030204" pitchFamily="49" charset="0"/>
+              </a:rPr>
+              <a:t>, NULL, NULL)</a:t>
+            </a:r>
           </a:p>
           <a:p>
             <a:pPr marL="0" marR="0" lvl="0" indent="0" algn="l" defTabSz="914400" rtl="0" eaLnBrk="0" fontAlgn="base" latinLnBrk="0" hangingPunct="0">
@@ -5961,205 +5964,7 @@
               <a:buNone/>
               <a:tabLst/>
             </a:pPr>
-            <a:r>
-              <a:rPr kumimoji="0" lang="en-AU" altLang="zh-CN" sz="1200" i="0" u="none" strike="noStrike" cap="none" normalizeH="0" baseline="0" dirty="0" err="1">
-                <a:ln>
-                  <a:noFill/>
-                </a:ln>
-                <a:effectLst/>
-                <a:latin typeface="Consolas" panose="020B0609020204030204" pitchFamily="49" charset="0"/>
-              </a:rPr>
-              <a:t>SDL_Surface</a:t>
-            </a:r>
-            <a:r>
-              <a:rPr lang="en-AU" altLang="zh-CN" dirty="0">
-                <a:latin typeface="Consolas" panose="020B0609020204030204" pitchFamily="49" charset="0"/>
-              </a:rPr>
-              <a:t>* </a:t>
-            </a:r>
-            <a:r>
-              <a:rPr lang="en-AU" altLang="zh-CN" dirty="0" err="1">
-                <a:latin typeface="Consolas" panose="020B0609020204030204" pitchFamily="49" charset="0"/>
-              </a:rPr>
-              <a:t>y</a:t>
-            </a:r>
-            <a:r>
-              <a:rPr kumimoji="0" lang="en-AU" altLang="zh-CN" sz="1200" i="0" u="none" strike="noStrike" cap="none" normalizeH="0" baseline="0" dirty="0" err="1">
-                <a:ln>
-                  <a:noFill/>
-                </a:ln>
-                <a:effectLst/>
-                <a:latin typeface="Consolas" panose="020B0609020204030204" pitchFamily="49" charset="0"/>
-              </a:rPr>
-              <a:t>uzuri</a:t>
-            </a:r>
-            <a:r>
-              <a:rPr lang="en-AU" altLang="zh-CN" dirty="0" err="1">
-                <a:latin typeface="Consolas" panose="020B0609020204030204" pitchFamily="49" charset="0"/>
-              </a:rPr>
-              <a:t>haSurface</a:t>
-            </a:r>
-            <a:r>
-              <a:rPr lang="en-AU" altLang="zh-CN" dirty="0">
-                <a:latin typeface="Consolas" panose="020B0609020204030204" pitchFamily="49" charset="0"/>
-              </a:rPr>
-              <a:t> = </a:t>
-            </a:r>
-            <a:r>
-              <a:rPr lang="en-AU" altLang="zh-CN" dirty="0" err="1">
-                <a:latin typeface="Consolas" panose="020B0609020204030204" pitchFamily="49" charset="0"/>
-              </a:rPr>
-              <a:t>IMG_Load</a:t>
-            </a:r>
-            <a:r>
-              <a:rPr lang="en-AU" altLang="zh-CN" dirty="0">
-                <a:latin typeface="Consolas" panose="020B0609020204030204" pitchFamily="49" charset="0"/>
-              </a:rPr>
-              <a:t>(“yuzuruha.png”);</a:t>
-            </a:r>
-          </a:p>
-          <a:p>
-            <a:pPr marL="0" marR="0" lvl="0" indent="0" algn="l" defTabSz="914400" rtl="0" eaLnBrk="0" fontAlgn="base" latinLnBrk="0" hangingPunct="0">
-              <a:lnSpc>
-                <a:spcPct val="100000"/>
-              </a:lnSpc>
-              <a:spcBef>
-                <a:spcPct val="30000"/>
-              </a:spcBef>
-              <a:spcAft>
-                <a:spcPct val="0"/>
-              </a:spcAft>
-              <a:buClrTx/>
-              <a:buSzTx/>
-              <a:buFontTx/>
-              <a:buNone/>
-              <a:tabLst/>
-            </a:pPr>
-            <a:r>
-              <a:rPr kumimoji="0" lang="en-AU" altLang="zh-CN" sz="1200" b="0" i="0" u="none" strike="noStrike" cap="none" normalizeH="0" baseline="0" dirty="0" err="1">
-                <a:ln>
-                  <a:noFill/>
-                </a:ln>
-                <a:effectLst/>
-                <a:latin typeface="Consolas" panose="020B0609020204030204" pitchFamily="49" charset="0"/>
-              </a:rPr>
-              <a:t>SDL_Texture</a:t>
-            </a:r>
-            <a:r>
-              <a:rPr kumimoji="0" lang="en-AU" altLang="zh-CN" sz="1200" b="0" i="0" u="none" strike="noStrike" cap="none" normalizeH="0" baseline="0" dirty="0">
-                <a:ln>
-                  <a:noFill/>
-                </a:ln>
-                <a:effectLst/>
-                <a:latin typeface="Consolas" panose="020B0609020204030204" pitchFamily="49" charset="0"/>
-              </a:rPr>
-              <a:t>* </a:t>
-            </a:r>
-            <a:r>
-              <a:rPr kumimoji="0" lang="en-AU" altLang="zh-CN" sz="1200" b="0" i="0" u="none" strike="noStrike" cap="none" normalizeH="0" baseline="0" dirty="0" err="1">
-                <a:ln>
-                  <a:noFill/>
-                </a:ln>
-                <a:effectLst/>
-                <a:latin typeface="Consolas" panose="020B0609020204030204" pitchFamily="49" charset="0"/>
-              </a:rPr>
-              <a:t>mTexture</a:t>
-            </a:r>
-            <a:r>
-              <a:rPr kumimoji="0" lang="en-AU" altLang="zh-CN" sz="1200" b="0" i="0" u="none" strike="noStrike" cap="none" normalizeH="0" baseline="0" dirty="0">
-                <a:ln>
-                  <a:noFill/>
-                </a:ln>
-                <a:effectLst/>
-                <a:latin typeface="Consolas" panose="020B0609020204030204" pitchFamily="49" charset="0"/>
-              </a:rPr>
-              <a:t> = </a:t>
-            </a:r>
-            <a:r>
-              <a:rPr kumimoji="0" lang="en-AU" altLang="zh-CN" sz="1200" b="0" i="0" u="none" strike="noStrike" cap="none" normalizeH="0" baseline="0" dirty="0" err="1">
-                <a:ln>
-                  <a:noFill/>
-                </a:ln>
-                <a:effectLst/>
-                <a:latin typeface="Consolas" panose="020B0609020204030204" pitchFamily="49" charset="0"/>
-              </a:rPr>
-              <a:t>Crea</a:t>
-            </a:r>
-            <a:r>
-              <a:rPr kumimoji="0" lang="en-US" altLang="zh-CN" sz="1200" b="0" i="0" u="none" strike="noStrike" cap="none" normalizeH="0" baseline="0" dirty="0" err="1">
-                <a:ln>
-                  <a:noFill/>
-                </a:ln>
-                <a:effectLst/>
-                <a:latin typeface="Consolas" panose="020B0609020204030204" pitchFamily="49" charset="0"/>
-              </a:rPr>
-              <a:t>teTextureFromSurface</a:t>
-            </a:r>
-            <a:r>
-              <a:rPr kumimoji="0" lang="en-US" altLang="zh-CN" sz="1200" b="0" i="0" u="none" strike="noStrike" cap="none" normalizeH="0" baseline="0" dirty="0">
-                <a:ln>
-                  <a:noFill/>
-                </a:ln>
-                <a:effectLst/>
-                <a:latin typeface="Consolas" panose="020B0609020204030204" pitchFamily="49" charset="0"/>
-              </a:rPr>
-              <a:t>(</a:t>
-            </a:r>
-            <a:r>
-              <a:rPr kumimoji="0" lang="en-US" altLang="zh-CN" sz="1200" b="0" i="0" u="none" strike="noStrike" cap="none" normalizeH="0" baseline="0" dirty="0" err="1">
-                <a:ln>
-                  <a:noFill/>
-                </a:ln>
-                <a:effectLst/>
-                <a:latin typeface="Consolas" panose="020B0609020204030204" pitchFamily="49" charset="0"/>
-              </a:rPr>
-              <a:t>gRender</a:t>
-            </a:r>
-            <a:r>
-              <a:rPr kumimoji="0" lang="en-US" altLang="zh-CN" sz="1200" b="0" i="0" u="none" strike="noStrike" cap="none" normalizeH="0" baseline="0" dirty="0">
-                <a:ln>
-                  <a:noFill/>
-                </a:ln>
-                <a:effectLst/>
-                <a:latin typeface="Consolas" panose="020B0609020204030204" pitchFamily="49" charset="0"/>
-              </a:rPr>
-              <a:t>, </a:t>
-            </a:r>
-            <a:r>
-              <a:rPr lang="en-AU" altLang="zh-CN" dirty="0" err="1">
-                <a:latin typeface="Consolas" panose="020B0609020204030204" pitchFamily="49" charset="0"/>
-              </a:rPr>
-              <a:t>y</a:t>
-            </a:r>
-            <a:r>
-              <a:rPr kumimoji="0" lang="en-AU" altLang="zh-CN" sz="1000" b="0" i="0" u="none" strike="noStrike" cap="none" normalizeH="0" baseline="0" dirty="0" err="1">
-                <a:ln>
-                  <a:noFill/>
-                </a:ln>
-                <a:effectLst/>
-                <a:latin typeface="Consolas" panose="020B0609020204030204" pitchFamily="49" charset="0"/>
-              </a:rPr>
-              <a:t>uzuri</a:t>
-            </a:r>
-            <a:r>
-              <a:rPr lang="en-AU" altLang="zh-CN" dirty="0" err="1">
-                <a:latin typeface="Consolas" panose="020B0609020204030204" pitchFamily="49" charset="0"/>
-              </a:rPr>
-              <a:t>haSurface</a:t>
-            </a:r>
-            <a:r>
-              <a:rPr kumimoji="0" lang="en-US" altLang="zh-CN" sz="1200" b="0" i="0" u="none" strike="noStrike" cap="none" normalizeH="0" baseline="0" dirty="0">
-                <a:ln>
-                  <a:noFill/>
-                </a:ln>
-                <a:effectLst/>
-                <a:latin typeface="Consolas" panose="020B0609020204030204" pitchFamily="49" charset="0"/>
-              </a:rPr>
-              <a:t>);</a:t>
-            </a:r>
-          </a:p>
-          <a:p>
-            <a:endParaRPr kumimoji="0" lang="en-US" altLang="zh-CN" sz="1200" b="0" i="0" u="none" strike="noStrike" cap="none" normalizeH="0" baseline="0" dirty="0">
+            <a:endParaRPr kumimoji="0" lang="en-US" altLang="zh-CN" sz="1100" b="0" i="0" u="none" strike="noStrike" cap="none" normalizeH="0" baseline="0" dirty="0">
               <a:ln>
                 <a:noFill/>
               </a:ln>
@@ -6173,102 +5978,90 @@
               <a:latin typeface="Consolas" panose="020B0609020204030204" pitchFamily="49" charset="0"/>
             </a:endParaRPr>
           </a:p>
-          <a:p>
-            <a:r>
-              <a:rPr kumimoji="0" lang="en-US" altLang="zh-CN" sz="1100" b="0" i="0" u="none" strike="noStrike" cap="none" normalizeH="0" baseline="0" dirty="0">
-                <a:ln>
-                  <a:noFill/>
-                </a:ln>
-                <a:solidFill>
-                  <a:schemeClr val="accent6">
-                    <a:lumMod val="60000"/>
-                    <a:lumOff val="40000"/>
-                  </a:schemeClr>
-                </a:solidFill>
-                <a:effectLst/>
-                <a:latin typeface="Consolas" panose="020B0609020204030204" pitchFamily="49" charset="0"/>
-              </a:rPr>
-              <a:t>// </a:t>
-            </a:r>
-            <a:r>
-              <a:rPr lang="en-US" altLang="zh-CN" sz="1100" dirty="0">
-                <a:solidFill>
-                  <a:schemeClr val="accent6">
-                    <a:lumMod val="60000"/>
-                    <a:lumOff val="40000"/>
-                  </a:schemeClr>
-                </a:solidFill>
-                <a:latin typeface="Consolas" panose="020B0609020204030204" pitchFamily="49" charset="0"/>
-              </a:rPr>
-              <a:t>reset the render target</a:t>
-            </a:r>
-            <a:endParaRPr lang="en-US" altLang="zh-CN" sz="1100" dirty="0">
-              <a:latin typeface="Consolas" panose="020B0609020204030204" pitchFamily="49" charset="0"/>
-            </a:endParaRPr>
-          </a:p>
-          <a:p>
-            <a:pPr marL="0" marR="0" lvl="0" indent="0" algn="l" defTabSz="914400" rtl="0" eaLnBrk="0" fontAlgn="base" latinLnBrk="0" hangingPunct="0">
-              <a:lnSpc>
-                <a:spcPct val="100000"/>
-              </a:lnSpc>
-              <a:spcBef>
-                <a:spcPct val="30000"/>
-              </a:spcBef>
-              <a:spcAft>
-                <a:spcPct val="0"/>
-              </a:spcAft>
-              <a:buClrTx/>
-              <a:buSzTx/>
-              <a:buFontTx/>
-              <a:buNone/>
-              <a:tabLst/>
-            </a:pPr>
-            <a:r>
-              <a:rPr kumimoji="0" lang="en-US" altLang="zh-CN" sz="1200" b="0" i="0" u="none" strike="noStrike" cap="none" normalizeH="0" baseline="0" dirty="0" err="1">
-                <a:ln>
-                  <a:noFill/>
-                </a:ln>
-                <a:effectLst/>
-                <a:latin typeface="Consolas" panose="020B0609020204030204" pitchFamily="49" charset="0"/>
-              </a:rPr>
-              <a:t>SDL_SetRenderTarget</a:t>
-            </a:r>
-            <a:r>
-              <a:rPr kumimoji="0" lang="en-US" altLang="zh-CN" sz="1200" b="0" i="0" u="none" strike="noStrike" cap="none" normalizeH="0" baseline="0" dirty="0">
-                <a:ln>
-                  <a:noFill/>
-                </a:ln>
-                <a:effectLst/>
-                <a:latin typeface="Consolas" panose="020B0609020204030204" pitchFamily="49" charset="0"/>
-              </a:rPr>
-              <a:t>( </a:t>
-            </a:r>
-            <a:r>
-              <a:rPr kumimoji="0" lang="en-US" altLang="zh-CN" sz="1200" b="0" i="0" u="none" strike="noStrike" cap="none" normalizeH="0" baseline="0" dirty="0" err="1">
-                <a:ln>
-                  <a:noFill/>
-                </a:ln>
-                <a:effectLst/>
-                <a:latin typeface="Consolas" panose="020B0609020204030204" pitchFamily="49" charset="0"/>
-              </a:rPr>
-              <a:t>gRenderer</a:t>
-            </a:r>
-            <a:r>
-              <a:rPr kumimoji="0" lang="en-US" altLang="zh-CN" sz="1200" b="0" i="0" u="none" strike="noStrike" cap="none" normalizeH="0" baseline="0" dirty="0">
-                <a:ln>
-                  <a:noFill/>
-                </a:ln>
-                <a:effectLst/>
-                <a:latin typeface="Consolas" panose="020B0609020204030204" pitchFamily="49" charset="0"/>
-              </a:rPr>
-              <a:t>, NULL );</a:t>
-            </a:r>
-            <a:endParaRPr kumimoji="0" lang="en-AU" altLang="zh-CN" sz="1200" b="0" i="0" u="none" strike="noStrike" cap="none" normalizeH="0" baseline="0" dirty="0">
-              <a:ln>
-                <a:noFill/>
-              </a:ln>
-              <a:effectLst/>
-              <a:latin typeface="Consolas" panose="020B0609020204030204" pitchFamily="49" charset="0"/>
+        </p:txBody>
+      </p:sp>
+      <p:cxnSp>
+        <p:nvCxnSpPr>
+          <p:cNvPr id="23" name="Connector: Curved 22">
+            <a:extLst>
+              <a:ext uri="{FF2B5EF4-FFF2-40B4-BE49-F238E27FC236}">
+                <a16:creationId xmlns:a16="http://schemas.microsoft.com/office/drawing/2014/main" id="{ED09F126-4C2C-477E-BB71-71A98F6C63DD}"/>
+              </a:ext>
+            </a:extLst>
+          </p:cNvPr>
+          <p:cNvCxnSpPr>
+            <a:cxnSpLocks/>
+          </p:cNvCxnSpPr>
+          <p:nvPr/>
+        </p:nvCxnSpPr>
+        <p:spPr>
+          <a:xfrm rot="10800000">
+            <a:off x="2425501" y="1873045"/>
+            <a:ext cx="1841698" cy="1492234"/>
+          </a:xfrm>
+          <a:prstGeom prst="curvedConnector3">
+            <a:avLst/>
+          </a:prstGeom>
+          <a:ln w="38100">
+            <a:prstDash val="sysDash"/>
+            <a:tailEnd type="triangle"/>
+          </a:ln>
+        </p:spPr>
+        <p:style>
+          <a:lnRef idx="1">
+            <a:schemeClr val="accent1"/>
+          </a:lnRef>
+          <a:fillRef idx="0">
+            <a:schemeClr val="accent1"/>
+          </a:fillRef>
+          <a:effectRef idx="0">
+            <a:schemeClr val="accent1"/>
+          </a:effectRef>
+          <a:fontRef idx="minor">
+            <a:schemeClr val="tx1"/>
+          </a:fontRef>
+        </p:style>
+      </p:cxnSp>
+      <p:sp>
+        <p:nvSpPr>
+          <p:cNvPr id="25" name="TextBox 24">
+            <a:extLst>
+              <a:ext uri="{FF2B5EF4-FFF2-40B4-BE49-F238E27FC236}">
+                <a16:creationId xmlns:a16="http://schemas.microsoft.com/office/drawing/2014/main" id="{0D7F8E5C-F32D-4280-8AD2-6B4735478EB4}"/>
+              </a:ext>
+            </a:extLst>
+          </p:cNvPr>
+          <p:cNvSpPr txBox="1"/>
+          <p:nvPr/>
+        </p:nvSpPr>
+        <p:spPr>
+          <a:xfrm>
+            <a:off x="2586178" y="2434496"/>
+            <a:ext cx="1595309" cy="369332"/>
+          </a:xfrm>
+          <a:prstGeom prst="rect">
+            <a:avLst/>
+          </a:prstGeom>
+          <a:noFill/>
+        </p:spPr>
+        <p:txBody>
+          <a:bodyPr wrap="none" rtlCol="0">
+            <a:spAutoFit/>
+          </a:bodyPr>
+          <a:lstStyle/>
+          <a:p>
+            <a:r>
+              <a:rPr lang="en-US" altLang="zh-CN" dirty="0">
+                <a:highlight>
+                  <a:srgbClr val="FFFF00"/>
+                </a:highlight>
+              </a:rPr>
+              <a:t>Render Target</a:t>
+            </a:r>
+            <a:endParaRPr lang="zh-CN" altLang="en-US" dirty="0">
+              <a:highlight>
+                <a:srgbClr val="FFFF00"/>
+              </a:highlight>
             </a:endParaRPr>
           </a:p>
         </p:txBody>
@@ -6303,12 +6096,42 @@
           </a:prstGeom>
         </p:spPr>
       </p:pic>
-      <p:sp>
-        <p:nvSpPr>
-          <p:cNvPr id="17" name="TextBox 16">
-            <a:extLst>
-              <a:ext uri="{FF2B5EF4-FFF2-40B4-BE49-F238E27FC236}">
-                <a16:creationId xmlns:a16="http://schemas.microsoft.com/office/drawing/2014/main" id="{ADCE9459-F6FE-4893-8FB5-4A4C33B773F9}"/>
+      <p:pic>
+        <p:nvPicPr>
+          <p:cNvPr id="17" name="Picture 16">
+            <a:extLst>
+              <a:ext uri="{FF2B5EF4-FFF2-40B4-BE49-F238E27FC236}">
+                <a16:creationId xmlns:a16="http://schemas.microsoft.com/office/drawing/2014/main" id="{36640997-9EFE-4263-973C-05BAF78AFE91}"/>
+              </a:ext>
+            </a:extLst>
+          </p:cNvPr>
+          <p:cNvPicPr>
+            <a:picLocks noChangeAspect="1"/>
+          </p:cNvPicPr>
+          <p:nvPr/>
+        </p:nvPicPr>
+        <p:blipFill>
+          <a:blip r:embed="rId3"/>
+          <a:stretch>
+            <a:fillRect/>
+          </a:stretch>
+        </p:blipFill>
+        <p:spPr>
+          <a:xfrm>
+            <a:off x="9907557" y="5406412"/>
+            <a:ext cx="1259493" cy="1389673"/>
+          </a:xfrm>
+          <a:prstGeom prst="rect">
+            <a:avLst/>
+          </a:prstGeom>
+        </p:spPr>
+      </p:pic>
+      <p:sp>
+        <p:nvSpPr>
+          <p:cNvPr id="19" name="TextBox 18">
+            <a:extLst>
+              <a:ext uri="{FF2B5EF4-FFF2-40B4-BE49-F238E27FC236}">
+                <a16:creationId xmlns:a16="http://schemas.microsoft.com/office/drawing/2014/main" id="{23AA8A25-3D99-434B-931E-FC943E336841}"/>
               </a:ext>
             </a:extLst>
           </p:cNvPr>
@@ -6317,8 +6140,8 @@
         </p:nvSpPr>
         <p:spPr>
           <a:xfrm>
-            <a:off x="9703723" y="4374697"/>
-            <a:ext cx="1595309" cy="369332"/>
+            <a:off x="9657094" y="5102557"/>
+            <a:ext cx="1760418" cy="369332"/>
           </a:xfrm>
           <a:prstGeom prst="rect">
             <a:avLst/>
@@ -6332,25 +6155,17 @@
           <a:lstStyle/>
           <a:p>
             <a:r>
-              <a:rPr lang="en-US" altLang="zh-CN" dirty="0">
-                <a:highlight>
-                  <a:srgbClr val="FFFF00"/>
-                </a:highlight>
-              </a:rPr>
-              <a:t>Render Target</a:t>
-            </a:r>
-            <a:endParaRPr lang="zh-CN" altLang="en-US" dirty="0">
-              <a:highlight>
-                <a:srgbClr val="FFFF00"/>
-              </a:highlight>
-            </a:endParaRPr>
+              <a:rPr lang="en-US" altLang="zh-CN" dirty="0" err="1"/>
+              <a:t>yuzurihaTexture</a:t>
+            </a:r>
+            <a:endParaRPr lang="zh-CN" altLang="en-US" dirty="0"/>
           </a:p>
         </p:txBody>
       </p:sp>
     </p:spTree>
     <p:extLst>
       <p:ext uri="{BB962C8B-B14F-4D97-AF65-F5344CB8AC3E}">
-        <p14:creationId xmlns:p14="http://schemas.microsoft.com/office/powerpoint/2010/main" val="3087953402"/>
+        <p14:creationId xmlns:p14="http://schemas.microsoft.com/office/powerpoint/2010/main" val="540776457"/>
       </p:ext>
     </p:extLst>
   </p:cSld>
@@ -6762,8 +6577,8 @@
         </p:nvSpPr>
         <p:spPr bwMode="auto">
           <a:xfrm>
-            <a:off x="174528" y="4453231"/>
-            <a:ext cx="6378058" cy="2339726"/>
+            <a:off x="174528" y="4569956"/>
+            <a:ext cx="4643274" cy="1859594"/>
           </a:xfrm>
           <a:prstGeom prst="rect">
             <a:avLst/>
@@ -6927,6 +6742,37 @@
               <a:tabLst/>
             </a:pPr>
             <a:r>
+              <a:rPr lang="en-US" altLang="zh-CN" dirty="0">
+                <a:latin typeface="Consolas" panose="020B0609020204030204" pitchFamily="49" charset="0"/>
+              </a:rPr>
+              <a:t>……</a:t>
+            </a:r>
+            <a:endParaRPr kumimoji="0" lang="en-US" altLang="zh-CN" sz="1200" b="0" i="0" u="none" strike="noStrike" cap="none" normalizeH="0" baseline="0" dirty="0">
+              <a:ln>
+                <a:noFill/>
+              </a:ln>
+              <a:effectLst/>
+              <a:latin typeface="Consolas" panose="020B0609020204030204" pitchFamily="49" charset="0"/>
+            </a:endParaRPr>
+          </a:p>
+          <a:p>
+            <a:pPr marL="0" marR="0" lvl="0" indent="0" algn="l" defTabSz="914400" rtl="0" eaLnBrk="0" fontAlgn="base" latinLnBrk="0" hangingPunct="0">
+              <a:lnSpc>
+                <a:spcPct val="100000"/>
+              </a:lnSpc>
+              <a:spcBef>
+                <a:spcPct val="30000"/>
+              </a:spcBef>
+              <a:spcAft>
+                <a:spcPct val="0"/>
+              </a:spcAft>
+              <a:buClrTx/>
+              <a:buSzTx/>
+              <a:buFontTx/>
+              <a:buNone/>
+              <a:tabLst/>
+            </a:pPr>
+            <a:r>
               <a:rPr kumimoji="0" lang="zh-CN" altLang="zh-CN" sz="1200" b="0" i="0" u="none" strike="noStrike" cap="none" normalizeH="0" baseline="0" dirty="0">
                 <a:ln>
                   <a:noFill/>
@@ -7075,6 +6921,116 @@
             </a:endParaRPr>
           </a:p>
           <a:p>
+            <a:r>
+              <a:rPr kumimoji="0" lang="en-AU" altLang="zh-CN" b="0" i="0" u="none" strike="noStrike" cap="none" normalizeH="0" baseline="0" dirty="0" err="1">
+                <a:ln>
+                  <a:noFill/>
+                </a:ln>
+                <a:effectLst/>
+                <a:latin typeface="Consolas" panose="020B0609020204030204" pitchFamily="49" charset="0"/>
+              </a:rPr>
+              <a:t>SDL_RenderCopy</a:t>
+            </a:r>
+            <a:r>
+              <a:rPr kumimoji="0" lang="en-AU" altLang="zh-CN" b="0" i="0" u="none" strike="noStrike" cap="none" normalizeH="0" baseline="0" dirty="0">
+                <a:ln>
+                  <a:noFill/>
+                </a:ln>
+                <a:effectLst/>
+                <a:latin typeface="Consolas" panose="020B0609020204030204" pitchFamily="49" charset="0"/>
+              </a:rPr>
+              <a:t>(</a:t>
+            </a:r>
+            <a:r>
+              <a:rPr kumimoji="0" lang="en-AU" altLang="zh-CN" b="0" i="0" u="none" strike="noStrike" cap="none" normalizeH="0" baseline="0" dirty="0" err="1">
+                <a:ln>
+                  <a:noFill/>
+                </a:ln>
+                <a:effectLst/>
+                <a:latin typeface="Consolas" panose="020B0609020204030204" pitchFamily="49" charset="0"/>
+              </a:rPr>
+              <a:t>gRenderer</a:t>
+            </a:r>
+            <a:r>
+              <a:rPr kumimoji="0" lang="en-AU" altLang="zh-CN" b="0" i="0" u="none" strike="noStrike" cap="none" normalizeH="0" baseline="0" dirty="0">
+                <a:ln>
+                  <a:noFill/>
+                </a:ln>
+                <a:effectLst/>
+                <a:latin typeface="Consolas" panose="020B0609020204030204" pitchFamily="49" charset="0"/>
+              </a:rPr>
+              <a:t>, </a:t>
+            </a:r>
+            <a:r>
+              <a:rPr kumimoji="0" lang="en-US" altLang="zh-CN" b="0" i="0" u="none" strike="noStrike" cap="none" normalizeH="0" baseline="0" dirty="0" err="1">
+                <a:ln>
+                  <a:noFill/>
+                </a:ln>
+                <a:effectLst/>
+                <a:latin typeface="Consolas" panose="020B0609020204030204" pitchFamily="49" charset="0"/>
+              </a:rPr>
+              <a:t>yuzurihaTexture</a:t>
+            </a:r>
+            <a:r>
+              <a:rPr kumimoji="0" lang="en-AU" altLang="zh-CN" b="0" i="0" u="none" strike="noStrike" cap="none" normalizeH="0" baseline="0" dirty="0">
+                <a:ln>
+                  <a:noFill/>
+                </a:ln>
+                <a:effectLst/>
+                <a:latin typeface="Consolas" panose="020B0609020204030204" pitchFamily="49" charset="0"/>
+              </a:rPr>
+              <a:t>, NULL, NULL)</a:t>
+            </a:r>
+          </a:p>
+          <a:p>
+            <a:endParaRPr kumimoji="0" lang="en-US" altLang="zh-CN" sz="1200" b="0" i="0" u="none" strike="noStrike" cap="none" normalizeH="0" baseline="0" dirty="0">
+              <a:ln>
+                <a:noFill/>
+              </a:ln>
+              <a:solidFill>
+                <a:schemeClr val="accent6">
+                  <a:lumMod val="60000"/>
+                  <a:lumOff val="40000"/>
+                </a:schemeClr>
+              </a:solidFill>
+              <a:effectLst/>
+              <a:latin typeface="Consolas" panose="020B0609020204030204" pitchFamily="49" charset="0"/>
+            </a:endParaRPr>
+          </a:p>
+          <a:p>
+            <a:r>
+              <a:rPr kumimoji="0" lang="en-US" altLang="zh-CN" sz="1100" b="0" i="0" u="none" strike="noStrike" cap="none" normalizeH="0" baseline="0" dirty="0">
+                <a:ln>
+                  <a:noFill/>
+                </a:ln>
+                <a:solidFill>
+                  <a:schemeClr val="accent6">
+                    <a:lumMod val="60000"/>
+                    <a:lumOff val="40000"/>
+                  </a:schemeClr>
+                </a:solidFill>
+                <a:effectLst/>
+                <a:latin typeface="Consolas" panose="020B0609020204030204" pitchFamily="49" charset="0"/>
+              </a:rPr>
+              <a:t>// </a:t>
+            </a:r>
+            <a:r>
+              <a:rPr lang="en-US" altLang="zh-CN" sz="1100" dirty="0">
+                <a:solidFill>
+                  <a:schemeClr val="accent6">
+                    <a:lumMod val="60000"/>
+                    <a:lumOff val="40000"/>
+                  </a:schemeClr>
+                </a:solidFill>
+                <a:latin typeface="Consolas" panose="020B0609020204030204" pitchFamily="49" charset="0"/>
+              </a:rPr>
+              <a:t>reset the render target</a:t>
+            </a:r>
+            <a:endParaRPr lang="en-US" altLang="zh-CN" sz="1100" dirty="0">
+              <a:latin typeface="Consolas" panose="020B0609020204030204" pitchFamily="49" charset="0"/>
+            </a:endParaRPr>
+          </a:p>
+          <a:p>
             <a:pPr marL="0" marR="0" lvl="0" indent="0" algn="l" defTabSz="914400" rtl="0" eaLnBrk="0" fontAlgn="base" latinLnBrk="0" hangingPunct="0">
               <a:lnSpc>
                 <a:spcPct val="100000"/>
@@ -7092,61 +7048,705 @@
               <a:tabLst/>
             </a:pPr>
             <a:r>
-              <a:rPr kumimoji="0" lang="en-AU" altLang="zh-CN" sz="1200" i="0" u="none" strike="noStrike" cap="none" normalizeH="0" baseline="0" dirty="0" err="1">
+              <a:rPr kumimoji="0" lang="en-US" altLang="zh-CN" sz="1200" b="0" i="0" u="none" strike="noStrike" cap="none" normalizeH="0" baseline="0" dirty="0" err="1">
                 <a:ln>
                   <a:noFill/>
                 </a:ln>
                 <a:effectLst/>
                 <a:latin typeface="Consolas" panose="020B0609020204030204" pitchFamily="49" charset="0"/>
               </a:rPr>
-              <a:t>SDL_Surface</a:t>
-            </a:r>
-            <a:r>
-              <a:rPr lang="en-AU" altLang="zh-CN" dirty="0">
-                <a:latin typeface="Consolas" panose="020B0609020204030204" pitchFamily="49" charset="0"/>
-              </a:rPr>
-              <a:t>* </a:t>
-            </a:r>
-            <a:r>
-              <a:rPr lang="en-AU" altLang="zh-CN" dirty="0" err="1">
-                <a:latin typeface="Consolas" panose="020B0609020204030204" pitchFamily="49" charset="0"/>
-              </a:rPr>
-              <a:t>y</a:t>
-            </a:r>
-            <a:r>
-              <a:rPr kumimoji="0" lang="en-AU" altLang="zh-CN" sz="1200" i="0" u="none" strike="noStrike" cap="none" normalizeH="0" baseline="0" dirty="0" err="1">
+              <a:t>SDL_SetRenderTarget</a:t>
+            </a:r>
+            <a:r>
+              <a:rPr kumimoji="0" lang="en-US" altLang="zh-CN" sz="1200" b="0" i="0" u="none" strike="noStrike" cap="none" normalizeH="0" baseline="0" dirty="0">
                 <a:ln>
                   <a:noFill/>
                 </a:ln>
                 <a:effectLst/>
                 <a:latin typeface="Consolas" panose="020B0609020204030204" pitchFamily="49" charset="0"/>
               </a:rPr>
-              <a:t>uzuri</a:t>
-            </a:r>
-            <a:r>
-              <a:rPr lang="en-AU" altLang="zh-CN" dirty="0" err="1">
-                <a:latin typeface="Consolas" panose="020B0609020204030204" pitchFamily="49" charset="0"/>
-              </a:rPr>
-              <a:t>haSurface</a:t>
-            </a:r>
-            <a:r>
-              <a:rPr lang="en-AU" altLang="zh-CN" dirty="0">
-                <a:latin typeface="Consolas" panose="020B0609020204030204" pitchFamily="49" charset="0"/>
-              </a:rPr>
-              <a:t> = </a:t>
-            </a:r>
-            <a:r>
-              <a:rPr lang="en-AU" altLang="zh-CN" dirty="0" err="1">
-                <a:latin typeface="Consolas" panose="020B0609020204030204" pitchFamily="49" charset="0"/>
-              </a:rPr>
-              <a:t>IMG_Load</a:t>
-            </a:r>
-            <a:r>
-              <a:rPr lang="en-AU" altLang="zh-CN" dirty="0">
-                <a:latin typeface="Consolas" panose="020B0609020204030204" pitchFamily="49" charset="0"/>
-              </a:rPr>
-              <a:t>(“yuzuruha.png”);</a:t>
-            </a:r>
+              <a:t>( </a:t>
+            </a:r>
+            <a:r>
+              <a:rPr kumimoji="0" lang="en-US" altLang="zh-CN" sz="1200" b="0" i="0" u="none" strike="noStrike" cap="none" normalizeH="0" baseline="0" dirty="0" err="1">
+                <a:ln>
+                  <a:noFill/>
+                </a:ln>
+                <a:effectLst/>
+                <a:latin typeface="Consolas" panose="020B0609020204030204" pitchFamily="49" charset="0"/>
+              </a:rPr>
+              <a:t>gRenderer</a:t>
+            </a:r>
+            <a:r>
+              <a:rPr kumimoji="0" lang="en-US" altLang="zh-CN" sz="1200" b="0" i="0" u="none" strike="noStrike" cap="none" normalizeH="0" baseline="0" dirty="0">
+                <a:ln>
+                  <a:noFill/>
+                </a:ln>
+                <a:effectLst/>
+                <a:latin typeface="Consolas" panose="020B0609020204030204" pitchFamily="49" charset="0"/>
+              </a:rPr>
+              <a:t>, NULL );</a:t>
+            </a:r>
+            <a:endParaRPr kumimoji="0" lang="en-AU" altLang="zh-CN" sz="1200" b="0" i="0" u="none" strike="noStrike" cap="none" normalizeH="0" baseline="0" dirty="0">
+              <a:ln>
+                <a:noFill/>
+              </a:ln>
+              <a:effectLst/>
+              <a:latin typeface="Consolas" panose="020B0609020204030204" pitchFamily="49" charset="0"/>
+            </a:endParaRPr>
+          </a:p>
+        </p:txBody>
+      </p:sp>
+      <p:pic>
+        <p:nvPicPr>
+          <p:cNvPr id="3" name="Picture 2">
+            <a:extLst>
+              <a:ext uri="{FF2B5EF4-FFF2-40B4-BE49-F238E27FC236}">
+                <a16:creationId xmlns:a16="http://schemas.microsoft.com/office/drawing/2014/main" id="{46BFE751-BD90-449B-8EB2-704D3B1414FE}"/>
+              </a:ext>
+            </a:extLst>
+          </p:cNvPr>
+          <p:cNvPicPr>
+            <a:picLocks noChangeAspect="1"/>
+          </p:cNvPicPr>
+          <p:nvPr/>
+        </p:nvPicPr>
+        <p:blipFill>
+          <a:blip r:embed="rId3"/>
+          <a:stretch>
+            <a:fillRect/>
+          </a:stretch>
+        </p:blipFill>
+        <p:spPr>
+          <a:xfrm>
+            <a:off x="809001" y="839329"/>
+            <a:ext cx="1259493" cy="1389673"/>
+          </a:xfrm>
+          <a:prstGeom prst="rect">
+            <a:avLst/>
+          </a:prstGeom>
+        </p:spPr>
+      </p:pic>
+      <p:sp>
+        <p:nvSpPr>
+          <p:cNvPr id="17" name="TextBox 16">
+            <a:extLst>
+              <a:ext uri="{FF2B5EF4-FFF2-40B4-BE49-F238E27FC236}">
+                <a16:creationId xmlns:a16="http://schemas.microsoft.com/office/drawing/2014/main" id="{ADCE9459-F6FE-4893-8FB5-4A4C33B773F9}"/>
+              </a:ext>
+            </a:extLst>
+          </p:cNvPr>
+          <p:cNvSpPr txBox="1"/>
+          <p:nvPr/>
+        </p:nvSpPr>
+        <p:spPr>
+          <a:xfrm>
+            <a:off x="9703723" y="4374697"/>
+            <a:ext cx="1595309" cy="369332"/>
+          </a:xfrm>
+          <a:prstGeom prst="rect">
+            <a:avLst/>
+          </a:prstGeom>
+          <a:noFill/>
+        </p:spPr>
+        <p:txBody>
+          <a:bodyPr wrap="none" rtlCol="0">
+            <a:spAutoFit/>
+          </a:bodyPr>
+          <a:lstStyle/>
+          <a:p>
+            <a:r>
+              <a:rPr lang="en-US" altLang="zh-CN" dirty="0">
+                <a:highlight>
+                  <a:srgbClr val="FFFF00"/>
+                </a:highlight>
+              </a:rPr>
+              <a:t>Render Target</a:t>
+            </a:r>
+            <a:endParaRPr lang="zh-CN" altLang="en-US" dirty="0">
+              <a:highlight>
+                <a:srgbClr val="FFFF00"/>
+              </a:highlight>
+            </a:endParaRPr>
+          </a:p>
+        </p:txBody>
+      </p:sp>
+    </p:spTree>
+    <p:extLst>
+      <p:ext uri="{BB962C8B-B14F-4D97-AF65-F5344CB8AC3E}">
+        <p14:creationId xmlns:p14="http://schemas.microsoft.com/office/powerpoint/2010/main" val="3087953402"/>
+      </p:ext>
+    </p:extLst>
+  </p:cSld>
+  <p:clrMapOvr>
+    <a:masterClrMapping/>
+  </p:clrMapOvr>
+</p:sld>
+</file>
+
+<file path=ppt/slides/slide6.xml><?xml version="1.0" encoding="utf-8"?>
+<p:sld xmlns:a="http://schemas.openxmlformats.org/drawingml/2006/main" xmlns:r="http://schemas.openxmlformats.org/officeDocument/2006/relationships" xmlns:p="http://schemas.openxmlformats.org/presentationml/2006/main">
+  <p:cSld>
+    <p:spTree>
+      <p:nvGrpSpPr>
+        <p:cNvPr id="1" name=""/>
+        <p:cNvGrpSpPr/>
+        <p:nvPr/>
+      </p:nvGrpSpPr>
+      <p:grpSpPr>
+        <a:xfrm>
+          <a:off x="0" y="0"/>
+          <a:ext cx="0" cy="0"/>
+          <a:chOff x="0" y="0"/>
+          <a:chExt cx="0" cy="0"/>
+        </a:xfrm>
+      </p:grpSpPr>
+      <p:sp>
+        <p:nvSpPr>
+          <p:cNvPr id="4" name="Rectangle 3">
+            <a:extLst>
+              <a:ext uri="{FF2B5EF4-FFF2-40B4-BE49-F238E27FC236}">
+                <a16:creationId xmlns:a16="http://schemas.microsoft.com/office/drawing/2014/main" id="{E8B3A9E6-C2D3-4B44-B225-A25577EE960B}"/>
+              </a:ext>
+            </a:extLst>
+          </p:cNvPr>
+          <p:cNvSpPr/>
+          <p:nvPr/>
+        </p:nvSpPr>
+        <p:spPr>
+          <a:xfrm>
+            <a:off x="752168" y="796412"/>
+            <a:ext cx="1396180" cy="1475509"/>
+          </a:xfrm>
+          <a:prstGeom prst="rect">
+            <a:avLst/>
+          </a:prstGeom>
+        </p:spPr>
+        <p:style>
+          <a:lnRef idx="2">
+            <a:schemeClr val="accent1">
+              <a:shade val="50000"/>
+            </a:schemeClr>
+          </a:lnRef>
+          <a:fillRef idx="1">
+            <a:schemeClr val="accent1"/>
+          </a:fillRef>
+          <a:effectRef idx="0">
+            <a:schemeClr val="accent1"/>
+          </a:effectRef>
+          <a:fontRef idx="minor">
+            <a:schemeClr val="lt1"/>
+          </a:fontRef>
+        </p:style>
+        <p:txBody>
+          <a:bodyPr rtlCol="0" anchor="ctr"/>
+          <a:lstStyle/>
+          <a:p>
+            <a:pPr algn="ctr"/>
+            <a:endParaRPr lang="zh-CN" altLang="en-US" dirty="0"/>
+          </a:p>
+        </p:txBody>
+      </p:sp>
+      <p:sp>
+        <p:nvSpPr>
+          <p:cNvPr id="5" name="TextBox 4">
+            <a:extLst>
+              <a:ext uri="{FF2B5EF4-FFF2-40B4-BE49-F238E27FC236}">
+                <a16:creationId xmlns:a16="http://schemas.microsoft.com/office/drawing/2014/main" id="{464FB3C3-448F-4232-9CEF-8D8057F931C8}"/>
+              </a:ext>
+            </a:extLst>
+          </p:cNvPr>
+          <p:cNvSpPr txBox="1"/>
+          <p:nvPr/>
+        </p:nvSpPr>
+        <p:spPr>
+          <a:xfrm>
+            <a:off x="989234" y="427081"/>
+            <a:ext cx="1116011" cy="369332"/>
+          </a:xfrm>
+          <a:prstGeom prst="rect">
+            <a:avLst/>
+          </a:prstGeom>
+          <a:noFill/>
+        </p:spPr>
+        <p:txBody>
+          <a:bodyPr wrap="none" rtlCol="0">
+            <a:spAutoFit/>
+          </a:bodyPr>
+          <a:lstStyle/>
+          <a:p>
+            <a:r>
+              <a:rPr lang="en-US" altLang="zh-CN" dirty="0" err="1"/>
+              <a:t>mTexture</a:t>
+            </a:r>
+            <a:endParaRPr lang="zh-CN" altLang="en-US" dirty="0"/>
+          </a:p>
+        </p:txBody>
+      </p:sp>
+      <p:cxnSp>
+        <p:nvCxnSpPr>
+          <p:cNvPr id="9" name="Straight Arrow Connector 8">
+            <a:extLst>
+              <a:ext uri="{FF2B5EF4-FFF2-40B4-BE49-F238E27FC236}">
+                <a16:creationId xmlns:a16="http://schemas.microsoft.com/office/drawing/2014/main" id="{A2BB8D9A-7626-4526-A5C3-04A0504D6A2B}"/>
+              </a:ext>
+            </a:extLst>
+          </p:cNvPr>
+          <p:cNvCxnSpPr/>
+          <p:nvPr/>
+        </p:nvCxnSpPr>
+        <p:spPr>
+          <a:xfrm>
+            <a:off x="2290916" y="796413"/>
+            <a:ext cx="0" cy="1371600"/>
+          </a:xfrm>
+          <a:prstGeom prst="straightConnector1">
+            <a:avLst/>
+          </a:prstGeom>
+          <a:ln>
+            <a:headEnd type="triangle"/>
+            <a:tailEnd type="triangle"/>
+          </a:ln>
+        </p:spPr>
+        <p:style>
+          <a:lnRef idx="1">
+            <a:schemeClr val="accent1"/>
+          </a:lnRef>
+          <a:fillRef idx="0">
+            <a:schemeClr val="accent1"/>
+          </a:fillRef>
+          <a:effectRef idx="0">
+            <a:schemeClr val="accent1"/>
+          </a:effectRef>
+          <a:fontRef idx="minor">
+            <a:schemeClr val="tx1"/>
+          </a:fontRef>
+        </p:style>
+      </p:cxnSp>
+      <p:cxnSp>
+        <p:nvCxnSpPr>
+          <p:cNvPr id="10" name="Straight Arrow Connector 9">
+            <a:extLst>
+              <a:ext uri="{FF2B5EF4-FFF2-40B4-BE49-F238E27FC236}">
+                <a16:creationId xmlns:a16="http://schemas.microsoft.com/office/drawing/2014/main" id="{CFB3B889-2AA8-4373-B770-190AE846530F}"/>
+              </a:ext>
+            </a:extLst>
+          </p:cNvPr>
+          <p:cNvCxnSpPr>
+            <a:cxnSpLocks/>
+          </p:cNvCxnSpPr>
+          <p:nvPr/>
+        </p:nvCxnSpPr>
+        <p:spPr>
+          <a:xfrm flipH="1">
+            <a:off x="752169" y="2329281"/>
+            <a:ext cx="1396179" cy="0"/>
+          </a:xfrm>
+          <a:prstGeom prst="straightConnector1">
+            <a:avLst/>
+          </a:prstGeom>
+          <a:ln>
+            <a:headEnd type="triangle"/>
+            <a:tailEnd type="triangle"/>
+          </a:ln>
+        </p:spPr>
+        <p:style>
+          <a:lnRef idx="1">
+            <a:schemeClr val="accent1"/>
+          </a:lnRef>
+          <a:fillRef idx="0">
+            <a:schemeClr val="accent1"/>
+          </a:fillRef>
+          <a:effectRef idx="0">
+            <a:schemeClr val="accent1"/>
+          </a:effectRef>
+          <a:fontRef idx="minor">
+            <a:schemeClr val="tx1"/>
+          </a:fontRef>
+        </p:style>
+      </p:cxnSp>
+      <p:sp>
+        <p:nvSpPr>
+          <p:cNvPr id="13" name="TextBox 12">
+            <a:extLst>
+              <a:ext uri="{FF2B5EF4-FFF2-40B4-BE49-F238E27FC236}">
+                <a16:creationId xmlns:a16="http://schemas.microsoft.com/office/drawing/2014/main" id="{A7164C73-C756-45AC-BD5C-E91D50991502}"/>
+              </a:ext>
+            </a:extLst>
+          </p:cNvPr>
+          <p:cNvSpPr txBox="1"/>
+          <p:nvPr/>
+        </p:nvSpPr>
+        <p:spPr>
+          <a:xfrm>
+            <a:off x="2290916" y="1297547"/>
+            <a:ext cx="814647" cy="369332"/>
+          </a:xfrm>
+          <a:prstGeom prst="rect">
+            <a:avLst/>
+          </a:prstGeom>
+          <a:noFill/>
+        </p:spPr>
+        <p:txBody>
+          <a:bodyPr wrap="none" rtlCol="0">
+            <a:spAutoFit/>
+          </a:bodyPr>
+          <a:lstStyle/>
+          <a:p>
+            <a:r>
+              <a:rPr lang="en-US" altLang="zh-CN" dirty="0"/>
+              <a:t>height</a:t>
+            </a:r>
+            <a:endParaRPr lang="zh-CN" altLang="en-US" dirty="0"/>
+          </a:p>
+        </p:txBody>
+      </p:sp>
+      <p:sp>
+        <p:nvSpPr>
+          <p:cNvPr id="14" name="TextBox 13">
+            <a:extLst>
+              <a:ext uri="{FF2B5EF4-FFF2-40B4-BE49-F238E27FC236}">
+                <a16:creationId xmlns:a16="http://schemas.microsoft.com/office/drawing/2014/main" id="{46A43BF4-B2AB-439E-B4B7-41536A7F4422}"/>
+              </a:ext>
+            </a:extLst>
+          </p:cNvPr>
+          <p:cNvSpPr txBox="1"/>
+          <p:nvPr/>
+        </p:nvSpPr>
+        <p:spPr>
+          <a:xfrm>
+            <a:off x="1084612" y="2356850"/>
+            <a:ext cx="731290" cy="369332"/>
+          </a:xfrm>
+          <a:prstGeom prst="rect">
+            <a:avLst/>
+          </a:prstGeom>
+          <a:noFill/>
+        </p:spPr>
+        <p:txBody>
+          <a:bodyPr wrap="none" rtlCol="0">
+            <a:spAutoFit/>
+          </a:bodyPr>
+          <a:lstStyle/>
+          <a:p>
+            <a:r>
+              <a:rPr lang="en-US" altLang="zh-CN" dirty="0"/>
+              <a:t>width</a:t>
+            </a:r>
+            <a:endParaRPr lang="zh-CN" altLang="en-US" dirty="0"/>
+          </a:p>
+        </p:txBody>
+      </p:sp>
+      <p:sp>
+        <p:nvSpPr>
+          <p:cNvPr id="15" name="Rectangle 14">
+            <a:extLst>
+              <a:ext uri="{FF2B5EF4-FFF2-40B4-BE49-F238E27FC236}">
+                <a16:creationId xmlns:a16="http://schemas.microsoft.com/office/drawing/2014/main" id="{8D25656D-EA49-4F9D-B7D1-967714F22B95}"/>
+              </a:ext>
+            </a:extLst>
+          </p:cNvPr>
+          <p:cNvSpPr/>
+          <p:nvPr/>
+        </p:nvSpPr>
+        <p:spPr>
+          <a:xfrm>
+            <a:off x="4401782" y="943898"/>
+            <a:ext cx="7156033" cy="4021392"/>
+          </a:xfrm>
+          <a:prstGeom prst="rect">
+            <a:avLst/>
+          </a:prstGeom>
+        </p:spPr>
+        <p:style>
+          <a:lnRef idx="2">
+            <a:schemeClr val="accent1">
+              <a:shade val="50000"/>
+            </a:schemeClr>
+          </a:lnRef>
+          <a:fillRef idx="1">
+            <a:schemeClr val="accent1"/>
+          </a:fillRef>
+          <a:effectRef idx="0">
+            <a:schemeClr val="accent1"/>
+          </a:effectRef>
+          <a:fontRef idx="minor">
+            <a:schemeClr val="lt1"/>
+          </a:fontRef>
+        </p:style>
+        <p:txBody>
+          <a:bodyPr rtlCol="0" anchor="ctr"/>
+          <a:lstStyle/>
+          <a:p>
+            <a:pPr algn="ctr"/>
+            <a:endParaRPr lang="zh-CN" altLang="en-US" dirty="0"/>
+          </a:p>
+        </p:txBody>
+      </p:sp>
+      <p:sp>
+        <p:nvSpPr>
+          <p:cNvPr id="16" name="TextBox 15">
+            <a:extLst>
+              <a:ext uri="{FF2B5EF4-FFF2-40B4-BE49-F238E27FC236}">
+                <a16:creationId xmlns:a16="http://schemas.microsoft.com/office/drawing/2014/main" id="{994A0BAE-8598-4216-AEB8-27603B0815BA}"/>
+              </a:ext>
+            </a:extLst>
+          </p:cNvPr>
+          <p:cNvSpPr txBox="1"/>
+          <p:nvPr/>
+        </p:nvSpPr>
+        <p:spPr>
+          <a:xfrm>
+            <a:off x="6855123" y="509070"/>
+            <a:ext cx="2611612" cy="369332"/>
+          </a:xfrm>
+          <a:prstGeom prst="rect">
+            <a:avLst/>
+          </a:prstGeom>
+          <a:noFill/>
+        </p:spPr>
+        <p:txBody>
+          <a:bodyPr wrap="none" rtlCol="0">
+            <a:spAutoFit/>
+          </a:bodyPr>
+          <a:lstStyle/>
+          <a:p>
+            <a:r>
+              <a:rPr lang="en-US" altLang="zh-CN" dirty="0" err="1"/>
+              <a:t>gRenderer</a:t>
+            </a:r>
+            <a:r>
+              <a:rPr lang="en-US" altLang="zh-CN" dirty="0"/>
+              <a:t> (main screen)</a:t>
+            </a:r>
+            <a:endParaRPr lang="zh-CN" altLang="en-US" dirty="0"/>
+          </a:p>
+        </p:txBody>
+      </p:sp>
+      <p:pic>
+        <p:nvPicPr>
+          <p:cNvPr id="1026" name="Picture 2" descr="Guilty Crown - Japan Powered">
+            <a:extLst>
+              <a:ext uri="{FF2B5EF4-FFF2-40B4-BE49-F238E27FC236}">
+                <a16:creationId xmlns:a16="http://schemas.microsoft.com/office/drawing/2014/main" id="{F30AC453-1629-4143-BAF9-51C9268DC17F}"/>
+              </a:ext>
+            </a:extLst>
+          </p:cNvPr>
+          <p:cNvPicPr>
+            <a:picLocks noChangeAspect="1" noChangeArrowheads="1"/>
+          </p:cNvPicPr>
+          <p:nvPr/>
+        </p:nvPicPr>
+        <p:blipFill>
+          <a:blip r:embed="rId2">
+            <a:extLst>
+              <a:ext uri="{28A0092B-C50C-407E-A947-70E740481C1C}">
+                <a14:useLocalDpi xmlns:a14="http://schemas.microsoft.com/office/drawing/2010/main" val="0"/>
+              </a:ext>
+            </a:extLst>
+          </a:blip>
+          <a:srcRect/>
+          <a:stretch>
+            <a:fillRect/>
+          </a:stretch>
+        </p:blipFill>
+        <p:spPr bwMode="auto">
+          <a:xfrm>
+            <a:off x="4490274" y="1031833"/>
+            <a:ext cx="6995401" cy="3860267"/>
+          </a:xfrm>
+          <a:prstGeom prst="rect">
+            <a:avLst/>
+          </a:prstGeom>
+          <a:noFill/>
+          <a:extLst>
+            <a:ext uri="{909E8E84-426E-40DD-AFC4-6F175D3DCCD1}">
+              <a14:hiddenFill xmlns:a14="http://schemas.microsoft.com/office/drawing/2010/main">
+                <a:solidFill>
+                  <a:srgbClr val="FFFFFF"/>
+                </a:solidFill>
+              </a14:hiddenFill>
+            </a:ext>
+          </a:extLst>
+        </p:spPr>
+      </p:pic>
+      <p:sp>
+        <p:nvSpPr>
+          <p:cNvPr id="18" name="Rectangle 3">
+            <a:extLst>
+              <a:ext uri="{FF2B5EF4-FFF2-40B4-BE49-F238E27FC236}">
+                <a16:creationId xmlns:a16="http://schemas.microsoft.com/office/drawing/2014/main" id="{D89161D7-9B74-4C06-BD7D-33C2185F349F}"/>
+              </a:ext>
+            </a:extLst>
+          </p:cNvPr>
+          <p:cNvSpPr>
+            <a:spLocks noChangeArrowheads="1"/>
+          </p:cNvSpPr>
+          <p:nvPr/>
+        </p:nvSpPr>
+        <p:spPr bwMode="auto">
+          <a:xfrm>
+            <a:off x="174528" y="4573264"/>
+            <a:ext cx="6378058" cy="2099660"/>
+          </a:xfrm>
+          <a:prstGeom prst="rect">
+            <a:avLst/>
+          </a:prstGeom>
+          <a:noFill/>
+          <a:ln>
+            <a:noFill/>
+          </a:ln>
+          <a:effectLst/>
+        </p:spPr>
+        <p:txBody>
+          <a:bodyPr vert="horz" wrap="square" lIns="0" tIns="0" rIns="0" bIns="53958" numCol="1" anchor="ctr" anchorCtr="0" compatLnSpc="1">
+            <a:prstTxWarp prst="textNoShape">
+              <a:avLst/>
+            </a:prstTxWarp>
+            <a:spAutoFit/>
+          </a:bodyPr>
+          <a:lstStyle>
+            <a:lvl1pPr eaLnBrk="0" fontAlgn="base" hangingPunct="0">
+              <a:spcBef>
+                <a:spcPct val="30000"/>
+              </a:spcBef>
+              <a:spcAft>
+                <a:spcPct val="0"/>
+              </a:spcAft>
+              <a:defRPr sz="1200">
+                <a:solidFill>
+                  <a:schemeClr val="tx1"/>
+                </a:solidFill>
+                <a:latin typeface="Arial" panose="020B0604020202020204" pitchFamily="34" charset="0"/>
+              </a:defRPr>
+            </a:lvl1pPr>
+            <a:lvl2pPr eaLnBrk="0" fontAlgn="base" hangingPunct="0">
+              <a:spcBef>
+                <a:spcPct val="30000"/>
+              </a:spcBef>
+              <a:spcAft>
+                <a:spcPct val="0"/>
+              </a:spcAft>
+              <a:defRPr sz="1200">
+                <a:solidFill>
+                  <a:schemeClr val="tx1"/>
+                </a:solidFill>
+                <a:latin typeface="Arial" panose="020B0604020202020204" pitchFamily="34" charset="0"/>
+              </a:defRPr>
+            </a:lvl2pPr>
+            <a:lvl3pPr eaLnBrk="0" fontAlgn="base" hangingPunct="0">
+              <a:spcBef>
+                <a:spcPct val="30000"/>
+              </a:spcBef>
+              <a:spcAft>
+                <a:spcPct val="0"/>
+              </a:spcAft>
+              <a:defRPr sz="1200">
+                <a:solidFill>
+                  <a:schemeClr val="tx1"/>
+                </a:solidFill>
+                <a:latin typeface="Arial" panose="020B0604020202020204" pitchFamily="34" charset="0"/>
+              </a:defRPr>
+            </a:lvl3pPr>
+            <a:lvl4pPr eaLnBrk="0" fontAlgn="base" hangingPunct="0">
+              <a:spcBef>
+                <a:spcPct val="30000"/>
+              </a:spcBef>
+              <a:spcAft>
+                <a:spcPct val="0"/>
+              </a:spcAft>
+              <a:defRPr sz="1200">
+                <a:solidFill>
+                  <a:schemeClr val="tx1"/>
+                </a:solidFill>
+                <a:latin typeface="Arial" panose="020B0604020202020204" pitchFamily="34" charset="0"/>
+              </a:defRPr>
+            </a:lvl4pPr>
+            <a:lvl5pPr eaLnBrk="0" fontAlgn="base" hangingPunct="0">
+              <a:spcBef>
+                <a:spcPct val="30000"/>
+              </a:spcBef>
+              <a:spcAft>
+                <a:spcPct val="0"/>
+              </a:spcAft>
+              <a:defRPr sz="1200">
+                <a:solidFill>
+                  <a:schemeClr val="tx1"/>
+                </a:solidFill>
+                <a:latin typeface="Arial" panose="020B0604020202020204" pitchFamily="34" charset="0"/>
+              </a:defRPr>
+            </a:lvl5pPr>
+            <a:lvl6pPr eaLnBrk="0" fontAlgn="base" hangingPunct="0">
+              <a:spcBef>
+                <a:spcPct val="30000"/>
+              </a:spcBef>
+              <a:spcAft>
+                <a:spcPct val="0"/>
+              </a:spcAft>
+              <a:defRPr sz="1200">
+                <a:solidFill>
+                  <a:schemeClr val="tx1"/>
+                </a:solidFill>
+                <a:latin typeface="Arial" panose="020B0604020202020204" pitchFamily="34" charset="0"/>
+              </a:defRPr>
+            </a:lvl6pPr>
+            <a:lvl7pPr eaLnBrk="0" fontAlgn="base" hangingPunct="0">
+              <a:spcBef>
+                <a:spcPct val="30000"/>
+              </a:spcBef>
+              <a:spcAft>
+                <a:spcPct val="0"/>
+              </a:spcAft>
+              <a:defRPr sz="1200">
+                <a:solidFill>
+                  <a:schemeClr val="tx1"/>
+                </a:solidFill>
+                <a:latin typeface="Arial" panose="020B0604020202020204" pitchFamily="34" charset="0"/>
+              </a:defRPr>
+            </a:lvl7pPr>
+            <a:lvl8pPr eaLnBrk="0" fontAlgn="base" hangingPunct="0">
+              <a:spcBef>
+                <a:spcPct val="30000"/>
+              </a:spcBef>
+              <a:spcAft>
+                <a:spcPct val="0"/>
+              </a:spcAft>
+              <a:defRPr sz="1200">
+                <a:solidFill>
+                  <a:schemeClr val="tx1"/>
+                </a:solidFill>
+                <a:latin typeface="Arial" panose="020B0604020202020204" pitchFamily="34" charset="0"/>
+              </a:defRPr>
+            </a:lvl8pPr>
+            <a:lvl9pPr eaLnBrk="0" fontAlgn="base" hangingPunct="0">
+              <a:spcBef>
+                <a:spcPct val="30000"/>
+              </a:spcBef>
+              <a:spcAft>
+                <a:spcPct val="0"/>
+              </a:spcAft>
+              <a:defRPr sz="1200">
+                <a:solidFill>
+                  <a:schemeClr val="tx1"/>
+                </a:solidFill>
+                <a:latin typeface="Arial" panose="020B0604020202020204" pitchFamily="34" charset="0"/>
+              </a:defRPr>
+            </a:lvl9pPr>
+          </a:lstStyle>
+          <a:p>
+            <a:r>
+              <a:rPr lang="en-US" altLang="zh-CN" dirty="0">
+                <a:latin typeface="Consolas" panose="020B0609020204030204" pitchFamily="49" charset="0"/>
+              </a:rPr>
+              <a:t>……</a:t>
+            </a:r>
+            <a:endParaRPr kumimoji="0" lang="en-US" altLang="zh-CN" sz="1200" b="0" i="0" u="none" strike="noStrike" cap="none" normalizeH="0" baseline="0" dirty="0">
+              <a:ln>
+                <a:noFill/>
+              </a:ln>
+              <a:effectLst/>
+              <a:latin typeface="Consolas" panose="020B0609020204030204" pitchFamily="49" charset="0"/>
+            </a:endParaRPr>
           </a:p>
           <a:p>
             <a:pPr marL="0" marR="0" lvl="0" indent="0" algn="l" defTabSz="914400" rtl="0" eaLnBrk="0" fontAlgn="base" latinLnBrk="0" hangingPunct="0">
@@ -7166,129 +7766,214 @@
               <a:tabLst/>
             </a:pPr>
             <a:r>
-              <a:rPr kumimoji="0" lang="en-AU" altLang="zh-CN" sz="1200" b="0" i="0" u="none" strike="noStrike" cap="none" normalizeH="0" baseline="0" dirty="0" err="1">
+              <a:rPr kumimoji="0" lang="zh-CN" altLang="zh-CN" sz="1200" b="0" i="0" u="none" strike="noStrike" cap="none" normalizeH="0" baseline="0" dirty="0">
                 <a:ln>
                   <a:noFill/>
                 </a:ln>
                 <a:effectLst/>
                 <a:latin typeface="Consolas" panose="020B0609020204030204" pitchFamily="49" charset="0"/>
               </a:rPr>
-              <a:t>SDL_Texture</a:t>
-            </a:r>
-            <a:r>
-              <a:rPr kumimoji="0" lang="en-AU" altLang="zh-CN" sz="1200" b="0" i="0" u="none" strike="noStrike" cap="none" normalizeH="0" baseline="0" dirty="0">
+              <a:t>SDL_SetRenderTarget</a:t>
+            </a:r>
+            <a:r>
+              <a:rPr kumimoji="0" lang="zh-CN" altLang="zh-CN" sz="1100" b="0" i="0" u="none" strike="noStrike" cap="none" normalizeH="0" baseline="0" dirty="0">
                 <a:ln>
                   <a:noFill/>
                 </a:ln>
                 <a:effectLst/>
                 <a:latin typeface="Consolas" panose="020B0609020204030204" pitchFamily="49" charset="0"/>
               </a:rPr>
-              <a:t>* </a:t>
-            </a:r>
-            <a:r>
-              <a:rPr kumimoji="0" lang="en-AU" altLang="zh-CN" sz="1200" b="0" i="0" u="none" strike="noStrike" cap="none" normalizeH="0" baseline="0" dirty="0" err="1">
+              <a:t>( </a:t>
+            </a:r>
+            <a:r>
+              <a:rPr kumimoji="0" lang="zh-CN" altLang="zh-CN" sz="1200" b="0" i="0" u="none" strike="noStrike" cap="none" normalizeH="0" baseline="0" dirty="0">
                 <a:ln>
                   <a:noFill/>
                 </a:ln>
                 <a:effectLst/>
                 <a:latin typeface="Consolas" panose="020B0609020204030204" pitchFamily="49" charset="0"/>
               </a:rPr>
-              <a:t>mTexture</a:t>
-            </a:r>
-            <a:r>
-              <a:rPr kumimoji="0" lang="en-AU" altLang="zh-CN" sz="1200" b="0" i="0" u="none" strike="noStrike" cap="none" normalizeH="0" baseline="0" dirty="0">
+              <a:t>gRenderer</a:t>
+            </a:r>
+            <a:r>
+              <a:rPr kumimoji="0" lang="zh-CN" altLang="zh-CN" sz="1100" b="0" i="0" u="none" strike="noStrike" cap="none" normalizeH="0" baseline="0" dirty="0">
                 <a:ln>
                   <a:noFill/>
                 </a:ln>
                 <a:effectLst/>
                 <a:latin typeface="Consolas" panose="020B0609020204030204" pitchFamily="49" charset="0"/>
               </a:rPr>
-              <a:t> = </a:t>
-            </a:r>
-            <a:r>
-              <a:rPr kumimoji="0" lang="en-AU" altLang="zh-CN" sz="1200" b="0" i="0" u="none" strike="noStrike" cap="none" normalizeH="0" baseline="0" dirty="0" err="1">
+              <a:t>, </a:t>
+            </a:r>
+            <a:r>
+              <a:rPr kumimoji="0" lang="zh-CN" altLang="zh-CN" sz="1200" b="0" i="0" u="none" strike="noStrike" cap="none" normalizeH="0" baseline="0" dirty="0">
                 <a:ln>
                   <a:noFill/>
                 </a:ln>
                 <a:effectLst/>
                 <a:latin typeface="Consolas" panose="020B0609020204030204" pitchFamily="49" charset="0"/>
               </a:rPr>
-              <a:t>Crea</a:t>
-            </a:r>
-            <a:r>
-              <a:rPr kumimoji="0" lang="en-US" altLang="zh-CN" sz="1200" b="0" i="0" u="none" strike="noStrike" cap="none" normalizeH="0" baseline="0" dirty="0" err="1">
+              <a:t>mTexture</a:t>
+            </a:r>
+            <a:r>
+              <a:rPr kumimoji="0" lang="zh-CN" altLang="zh-CN" sz="1100" b="0" i="0" u="none" strike="noStrike" cap="none" normalizeH="0" baseline="0" dirty="0">
                 <a:ln>
                   <a:noFill/>
                 </a:ln>
                 <a:effectLst/>
                 <a:latin typeface="Consolas" panose="020B0609020204030204" pitchFamily="49" charset="0"/>
               </a:rPr>
-              <a:t>teTextureFromSurface</a:t>
-            </a:r>
-            <a:r>
-              <a:rPr kumimoji="0" lang="en-US" altLang="zh-CN" sz="1200" b="0" i="0" u="none" strike="noStrike" cap="none" normalizeH="0" baseline="0" dirty="0">
+              <a:t> );</a:t>
+            </a:r>
+            <a:endParaRPr kumimoji="0" lang="en-US" altLang="zh-CN" sz="1100" b="0" i="0" u="none" strike="noStrike" cap="none" normalizeH="0" baseline="0" dirty="0">
+              <a:ln>
+                <a:noFill/>
+              </a:ln>
+              <a:effectLst/>
+              <a:latin typeface="Consolas" panose="020B0609020204030204" pitchFamily="49" charset="0"/>
+            </a:endParaRPr>
+          </a:p>
+          <a:p>
+            <a:pPr marL="0" marR="0" lvl="0" indent="0" algn="l" defTabSz="914400" rtl="0" eaLnBrk="0" fontAlgn="base" latinLnBrk="0" hangingPunct="0">
+              <a:lnSpc>
+                <a:spcPct val="100000"/>
+              </a:lnSpc>
+              <a:spcBef>
+                <a:spcPct val="30000"/>
+              </a:spcBef>
+              <a:spcAft>
+                <a:spcPct val="0"/>
+              </a:spcAft>
+              <a:buClrTx/>
+              <a:buSzTx/>
+              <a:buFontTx/>
+              <a:buNone/>
+              <a:tabLst/>
+            </a:pPr>
+            <a:endParaRPr lang="en-US" altLang="zh-CN" sz="1100" dirty="0">
+              <a:latin typeface="Consolas" panose="020B0609020204030204" pitchFamily="49" charset="0"/>
+            </a:endParaRPr>
+          </a:p>
+          <a:p>
+            <a:pPr marL="0" marR="0" lvl="0" indent="0" algn="l" defTabSz="914400" rtl="0" eaLnBrk="0" fontAlgn="base" latinLnBrk="0" hangingPunct="0">
+              <a:lnSpc>
+                <a:spcPct val="100000"/>
+              </a:lnSpc>
+              <a:spcBef>
+                <a:spcPct val="30000"/>
+              </a:spcBef>
+              <a:spcAft>
+                <a:spcPct val="0"/>
+              </a:spcAft>
+              <a:buClrTx/>
+              <a:buSzTx/>
+              <a:buFontTx/>
+              <a:buNone/>
+              <a:tabLst/>
+            </a:pPr>
+            <a:r>
+              <a:rPr kumimoji="0" lang="en-US" altLang="zh-CN" sz="1100" b="0" i="0" u="none" strike="noStrike" cap="none" normalizeH="0" baseline="0" dirty="0">
+                <a:ln>
+                  <a:noFill/>
+                </a:ln>
+                <a:solidFill>
+                  <a:schemeClr val="accent6">
+                    <a:lumMod val="60000"/>
+                    <a:lumOff val="40000"/>
+                  </a:schemeClr>
+                </a:solidFill>
+                <a:effectLst/>
+                <a:latin typeface="Consolas" panose="020B0609020204030204" pitchFamily="49" charset="0"/>
+              </a:rPr>
+              <a:t>// Drawin</a:t>
+            </a:r>
+            <a:r>
+              <a:rPr lang="en-US" altLang="zh-CN" sz="1100" dirty="0">
+                <a:solidFill>
+                  <a:schemeClr val="accent6">
+                    <a:lumMod val="60000"/>
+                    <a:lumOff val="40000"/>
+                  </a:schemeClr>
+                </a:solidFill>
+                <a:latin typeface="Consolas" panose="020B0609020204030204" pitchFamily="49" charset="0"/>
+              </a:rPr>
+              <a:t>g to image to render target…</a:t>
+            </a:r>
+            <a:endParaRPr kumimoji="0" lang="en-US" altLang="zh-CN" sz="500" b="1" i="0" u="none" strike="noStrike" cap="none" normalizeH="0" baseline="0" dirty="0">
+              <a:ln>
+                <a:noFill/>
+              </a:ln>
+              <a:solidFill>
+                <a:schemeClr val="accent6">
+                  <a:lumMod val="60000"/>
+                  <a:lumOff val="40000"/>
+                </a:schemeClr>
+              </a:solidFill>
+              <a:effectLst/>
+              <a:latin typeface="Consolas" panose="020B0609020204030204" pitchFamily="49" charset="0"/>
+            </a:endParaRPr>
+          </a:p>
+          <a:p>
+            <a:r>
+              <a:rPr kumimoji="0" lang="en-AU" altLang="zh-CN" b="0" i="0" u="none" strike="noStrike" cap="none" normalizeH="0" baseline="0" dirty="0" err="1">
                 <a:ln>
                   <a:noFill/>
                 </a:ln>
                 <a:effectLst/>
                 <a:latin typeface="Consolas" panose="020B0609020204030204" pitchFamily="49" charset="0"/>
               </a:rPr>
-              <a:t>(</a:t>
-            </a:r>
-            <a:r>
-              <a:rPr kumimoji="0" lang="en-US" altLang="zh-CN" sz="1200" b="0" i="0" u="none" strike="noStrike" cap="none" normalizeH="0" baseline="0" dirty="0" err="1">
+              <a:t>SDL_RenderCopy</a:t>
+            </a:r>
+            <a:r>
+              <a:rPr kumimoji="0" lang="en-AU" altLang="zh-CN" b="0" i="0" u="none" strike="noStrike" cap="none" normalizeH="0" baseline="0" dirty="0">
                 <a:ln>
                   <a:noFill/>
                 </a:ln>
                 <a:effectLst/>
                 <a:latin typeface="Consolas" panose="020B0609020204030204" pitchFamily="49" charset="0"/>
               </a:rPr>
-              <a:t>gRender</a:t>
-            </a:r>
-            <a:r>
-              <a:rPr kumimoji="0" lang="en-US" altLang="zh-CN" sz="1200" b="0" i="0" u="none" strike="noStrike" cap="none" normalizeH="0" baseline="0" dirty="0">
+              <a:t>(</a:t>
+            </a:r>
+            <a:r>
+              <a:rPr kumimoji="0" lang="en-AU" altLang="zh-CN" b="0" i="0" u="none" strike="noStrike" cap="none" normalizeH="0" baseline="0" dirty="0" err="1">
                 <a:ln>
                   <a:noFill/>
                 </a:ln>
                 <a:effectLst/>
                 <a:latin typeface="Consolas" panose="020B0609020204030204" pitchFamily="49" charset="0"/>
               </a:rPr>
-              <a:t>, </a:t>
-            </a:r>
-            <a:r>
-              <a:rPr lang="en-AU" altLang="zh-CN" dirty="0" err="1">
-                <a:latin typeface="Consolas" panose="020B0609020204030204" pitchFamily="49" charset="0"/>
-              </a:rPr>
-              <a:t>y</a:t>
-            </a:r>
-            <a:r>
-              <a:rPr kumimoji="0" lang="en-AU" altLang="zh-CN" sz="1000" b="0" i="0" u="none" strike="noStrike" cap="none" normalizeH="0" baseline="0" dirty="0" err="1">
+              <a:t>gRenderer</a:t>
+            </a:r>
+            <a:r>
+              <a:rPr kumimoji="0" lang="en-AU" altLang="zh-CN" b="0" i="0" u="none" strike="noStrike" cap="none" normalizeH="0" baseline="0" dirty="0">
                 <a:ln>
                   <a:noFill/>
                 </a:ln>
                 <a:effectLst/>
                 <a:latin typeface="Consolas" panose="020B0609020204030204" pitchFamily="49" charset="0"/>
               </a:rPr>
-              <a:t>uzuri</a:t>
-            </a:r>
-            <a:r>
-              <a:rPr lang="en-AU" altLang="zh-CN" dirty="0" err="1">
-                <a:latin typeface="Consolas" panose="020B0609020204030204" pitchFamily="49" charset="0"/>
-              </a:rPr>
-              <a:t>haSurface</a:t>
-            </a:r>
-            <a:r>
-              <a:rPr kumimoji="0" lang="en-US" altLang="zh-CN" sz="1200" b="0" i="0" u="none" strike="noStrike" cap="none" normalizeH="0" baseline="0" dirty="0">
+              <a:t>, </a:t>
+            </a:r>
+            <a:r>
+              <a:rPr kumimoji="0" lang="en-US" altLang="zh-CN" b="0" i="0" u="none" strike="noStrike" cap="none" normalizeH="0" baseline="0" dirty="0" err="1">
                 <a:ln>
                   <a:noFill/>
                 </a:ln>
                 <a:effectLst/>
                 <a:latin typeface="Consolas" panose="020B0609020204030204" pitchFamily="49" charset="0"/>
               </a:rPr>
-              <a:t>);</a:t>
-            </a:r>
-          </a:p>
-          <a:p>
+              <a:t>yuzurihaTexture</a:t>
+            </a:r>
+            <a:r>
+              <a:rPr kumimoji="0" lang="en-AU" altLang="zh-CN" b="0" i="0" u="none" strike="noStrike" cap="none" normalizeH="0" baseline="0" dirty="0">
+                <a:ln>
+                  <a:noFill/>
+                </a:ln>
+                <a:effectLst/>
+                <a:latin typeface="Consolas" panose="020B0609020204030204" pitchFamily="49" charset="0"/>
+              </a:rPr>
+              <a:t>, NULL, NULL)</a:t>
+            </a:r>
             <a:endParaRPr kumimoji="0" lang="en-US" altLang="zh-CN" sz="1200" b="0" i="0" u="none" strike="noStrike" cap="none" normalizeH="0" baseline="0" dirty="0">
               <a:ln>
                 <a:noFill/>
